--- a/Course content/Slides/Topic 8 - Clustering.pptx
+++ b/Course content/Slides/Topic 8 - Clustering.pptx
@@ -224,7 +224,7 @@
           <a:p>
             <a:fld id="{B9B1DC7F-8587-4047-9A5D-1FCB6614CAE0}" type="datetimeFigureOut">
               <a:rPr lang="en-US" smtClean="0"/>
-              <a:t>11/8/2022</a:t>
+              <a:t>11/15/2022</a:t>
             </a:fld>
             <a:endParaRPr lang="en-US"/>
           </a:p>
@@ -638,7 +638,7 @@
           <a:p>
             <a:fld id="{A7DB5662-7327-465C-9A70-AD96B7A8D67A}" type="datetimeFigureOut">
               <a:rPr lang="en-US" smtClean="0"/>
-              <a:t>11/8/2022</a:t>
+              <a:t>11/15/2022</a:t>
             </a:fld>
             <a:endParaRPr lang="en-US"/>
           </a:p>
@@ -836,7 +836,7 @@
           <a:p>
             <a:fld id="{A7DB5662-7327-465C-9A70-AD96B7A8D67A}" type="datetimeFigureOut">
               <a:rPr lang="en-US" smtClean="0"/>
-              <a:t>11/8/2022</a:t>
+              <a:t>11/15/2022</a:t>
             </a:fld>
             <a:endParaRPr lang="en-US"/>
           </a:p>
@@ -1044,7 +1044,7 @@
           <a:p>
             <a:fld id="{A7DB5662-7327-465C-9A70-AD96B7A8D67A}" type="datetimeFigureOut">
               <a:rPr lang="en-US" smtClean="0"/>
-              <a:t>11/8/2022</a:t>
+              <a:t>11/15/2022</a:t>
             </a:fld>
             <a:endParaRPr lang="en-US"/>
           </a:p>
@@ -1242,7 +1242,7 @@
           <a:p>
             <a:fld id="{A7DB5662-7327-465C-9A70-AD96B7A8D67A}" type="datetimeFigureOut">
               <a:rPr lang="en-US" smtClean="0"/>
-              <a:t>11/8/2022</a:t>
+              <a:t>11/15/2022</a:t>
             </a:fld>
             <a:endParaRPr lang="en-US"/>
           </a:p>
@@ -1517,7 +1517,7 @@
           <a:p>
             <a:fld id="{A7DB5662-7327-465C-9A70-AD96B7A8D67A}" type="datetimeFigureOut">
               <a:rPr lang="en-US" smtClean="0"/>
-              <a:t>11/8/2022</a:t>
+              <a:t>11/15/2022</a:t>
             </a:fld>
             <a:endParaRPr lang="en-US"/>
           </a:p>
@@ -1782,7 +1782,7 @@
           <a:p>
             <a:fld id="{A7DB5662-7327-465C-9A70-AD96B7A8D67A}" type="datetimeFigureOut">
               <a:rPr lang="en-US" smtClean="0"/>
-              <a:t>11/8/2022</a:t>
+              <a:t>11/15/2022</a:t>
             </a:fld>
             <a:endParaRPr lang="en-US"/>
           </a:p>
@@ -2194,7 +2194,7 @@
           <a:p>
             <a:fld id="{A7DB5662-7327-465C-9A70-AD96B7A8D67A}" type="datetimeFigureOut">
               <a:rPr lang="en-US" smtClean="0"/>
-              <a:t>11/8/2022</a:t>
+              <a:t>11/15/2022</a:t>
             </a:fld>
             <a:endParaRPr lang="en-US"/>
           </a:p>
@@ -2335,7 +2335,7 @@
           <a:p>
             <a:fld id="{A7DB5662-7327-465C-9A70-AD96B7A8D67A}" type="datetimeFigureOut">
               <a:rPr lang="en-US" smtClean="0"/>
-              <a:t>11/8/2022</a:t>
+              <a:t>11/15/2022</a:t>
             </a:fld>
             <a:endParaRPr lang="en-US"/>
           </a:p>
@@ -2448,7 +2448,7 @@
           <a:p>
             <a:fld id="{A7DB5662-7327-465C-9A70-AD96B7A8D67A}" type="datetimeFigureOut">
               <a:rPr lang="en-US" smtClean="0"/>
-              <a:t>11/8/2022</a:t>
+              <a:t>11/15/2022</a:t>
             </a:fld>
             <a:endParaRPr lang="en-US"/>
           </a:p>
@@ -2759,7 +2759,7 @@
           <a:p>
             <a:fld id="{A7DB5662-7327-465C-9A70-AD96B7A8D67A}" type="datetimeFigureOut">
               <a:rPr lang="en-US" smtClean="0"/>
-              <a:t>11/8/2022</a:t>
+              <a:t>11/15/2022</a:t>
             </a:fld>
             <a:endParaRPr lang="en-US"/>
           </a:p>
@@ -3047,7 +3047,7 @@
           <a:p>
             <a:fld id="{A7DB5662-7327-465C-9A70-AD96B7A8D67A}" type="datetimeFigureOut">
               <a:rPr lang="en-US" smtClean="0"/>
-              <a:t>11/8/2022</a:t>
+              <a:t>11/15/2022</a:t>
             </a:fld>
             <a:endParaRPr lang="en-US"/>
           </a:p>
@@ -3288,7 +3288,7 @@
           <a:p>
             <a:fld id="{A7DB5662-7327-465C-9A70-AD96B7A8D67A}" type="datetimeFigureOut">
               <a:rPr lang="en-US" smtClean="0"/>
-              <a:t>11/8/2022</a:t>
+              <a:t>11/15/2022</a:t>
             </a:fld>
             <a:endParaRPr lang="en-US"/>
           </a:p>
@@ -21692,8 +21692,8 @@
           </a:p>
         </p:txBody>
       </p:sp>
-      <mc:AlternateContent xmlns:mc="http://schemas.openxmlformats.org/markup-compatibility/2006" xmlns:a14="http://schemas.microsoft.com/office/drawing/2010/main">
-        <mc:Choice Requires="a14">
+      <mc:AlternateContent xmlns:mc="http://schemas.openxmlformats.org/markup-compatibility/2006">
+        <mc:Choice xmlns:a14="http://schemas.microsoft.com/office/drawing/2010/main" Requires="a14">
           <p:sp>
             <p:nvSpPr>
               <p:cNvPr id="3" name="Content Placeholder 2">
@@ -21752,7 +21752,7 @@
                   <a:rPr lang="en-US" sz="2000" dirty="0">
                     <a:latin typeface="+mj-lt"/>
                   </a:rPr>
-                  <a:t>overall the instances</a:t>
+                  <a:t>over all the instances</a:t>
                 </a:r>
                 <a:r>
                   <a:rPr lang="en-US" sz="2000" i="1" dirty="0">
@@ -21930,19 +21930,7 @@
                   <a:rPr lang="en-US" sz="1600" dirty="0">
                     <a:latin typeface="+mj-lt"/>
                   </a:rPr>
-                  <a:t>A coefficient close to +1 means that the instance is </a:t>
-                </a:r>
-                <a:r>
-                  <a:rPr lang="en-US" sz="1600" dirty="0" err="1">
-                    <a:latin typeface="+mj-lt"/>
-                  </a:rPr>
-                  <a:t>weel</a:t>
-                </a:r>
-                <a:r>
-                  <a:rPr lang="en-US" sz="1600" dirty="0">
-                    <a:latin typeface="+mj-lt"/>
-                  </a:rPr>
-                  <a:t> inside its own cluster and far from other clusters</a:t>
+                  <a:t>A coefficient close to +1 means that the instance is well inside its own cluster and far from other clusters</a:t>
                 </a:r>
               </a:p>
               <a:p>
@@ -21989,7 +21977,7 @@
             </p:txBody>
           </p:sp>
         </mc:Choice>
-        <mc:Fallback xmlns="">
+        <mc:Fallback>
           <p:sp>
             <p:nvSpPr>
               <p:cNvPr id="3" name="Content Placeholder 2">
@@ -26337,8 +26325,8 @@
         </p:nvSpPr>
         <p:spPr>
           <a:xfrm>
-            <a:off x="5586172" y="5919251"/>
-            <a:ext cx="2973445" cy="523220"/>
+            <a:off x="5273960" y="5919251"/>
+            <a:ext cx="3597869" cy="307777"/>
           </a:xfrm>
           <a:prstGeom prst="rect">
             <a:avLst/>
@@ -26374,23 +26362,7 @@
                   <a:srgbClr val="FF0000"/>
                 </a:solidFill>
               </a:rPr>
-              <a:t>(complete, </a:t>
-            </a:r>
-            <a:r>
-              <a:rPr lang="en-US" sz="1400" dirty="0" err="1">
-                <a:solidFill>
-                  <a:srgbClr val="FF0000"/>
-                </a:solidFill>
-              </a:rPr>
-              <a:t>asingle</a:t>
-            </a:r>
-            <a:r>
-              <a:rPr lang="en-US" sz="1400" dirty="0">
-                <a:solidFill>
-                  <a:srgbClr val="FF0000"/>
-                </a:solidFill>
-              </a:rPr>
-              <a:t>, average, centroid)</a:t>
+              <a:t>(complete, single, average, centroid)</a:t>
             </a:r>
             <a:endParaRPr lang="en-US" sz="1400" i="1" dirty="0">
               <a:solidFill>
@@ -26996,10 +26968,10 @@
               <a:buChar char="§"/>
             </a:pPr>
             <a:r>
-              <a:rPr lang="en-US" sz="2000" b="1" dirty="0">
+              <a:rPr lang="en-US" sz="2000" dirty="0">
                 <a:latin typeface="+mj-lt"/>
               </a:rPr>
-              <a:t>DBSCAN:</a:t>
+              <a:t>DBSCAN</a:t>
             </a:r>
           </a:p>
           <a:p>
@@ -27011,10 +26983,10 @@
               <a:buChar char="§"/>
             </a:pPr>
             <a:r>
-              <a:rPr lang="en-US" sz="2000" b="1" dirty="0">
+              <a:rPr lang="en-US" sz="2000" dirty="0">
                 <a:latin typeface="+mj-lt"/>
               </a:rPr>
-              <a:t>BIRCH:</a:t>
+              <a:t>BIRCH</a:t>
             </a:r>
           </a:p>
           <a:p>
@@ -27026,10 +26998,10 @@
               <a:buChar char="§"/>
             </a:pPr>
             <a:r>
-              <a:rPr lang="en-US" sz="2000" b="1" dirty="0">
+              <a:rPr lang="en-US" sz="2000" dirty="0">
                 <a:latin typeface="+mj-lt"/>
               </a:rPr>
-              <a:t>Mean-shift:</a:t>
+              <a:t>Mean-shift</a:t>
             </a:r>
           </a:p>
           <a:p>
@@ -27041,10 +27013,10 @@
               <a:buChar char="§"/>
             </a:pPr>
             <a:r>
-              <a:rPr lang="en-US" sz="2000" b="1" dirty="0">
+              <a:rPr lang="en-US" sz="2000" dirty="0">
                 <a:latin typeface="+mj-lt"/>
               </a:rPr>
-              <a:t>Affinity propagation:</a:t>
+              <a:t>Affinity propagation</a:t>
             </a:r>
           </a:p>
           <a:p>
@@ -27056,10 +27028,10 @@
               <a:buChar char="§"/>
             </a:pPr>
             <a:r>
-              <a:rPr lang="en-US" sz="2000" b="1" dirty="0">
+              <a:rPr lang="en-US" sz="2000" dirty="0">
                 <a:latin typeface="+mj-lt"/>
               </a:rPr>
-              <a:t>Spectral clustering:</a:t>
+              <a:t>Spectral clustering</a:t>
             </a:r>
           </a:p>
         </p:txBody>
@@ -28007,19 +27979,7 @@
               <a:rPr lang="en-US" sz="2000" i="1" dirty="0">
                 <a:latin typeface="+mj-lt"/>
               </a:rPr>
-              <a:t>what </a:t>
-            </a:r>
-            <a:r>
-              <a:rPr lang="en-US" sz="2000" dirty="0">
-                <a:latin typeface="+mj-lt"/>
-              </a:rPr>
-              <a:t>similar </a:t>
-            </a:r>
-            <a:r>
-              <a:rPr lang="en-US" sz="2000" i="1" dirty="0">
-                <a:latin typeface="+mj-lt"/>
-              </a:rPr>
-              <a:t>means?</a:t>
+              <a:t>what similar means?</a:t>
             </a:r>
             <a:endParaRPr lang="en-US" sz="2000" dirty="0">
               <a:latin typeface="+mj-lt"/>
@@ -28427,8 +28387,8 @@
           </a:p>
         </p:txBody>
       </p:sp>
-      <mc:AlternateContent xmlns:mc="http://schemas.openxmlformats.org/markup-compatibility/2006" xmlns:a14="http://schemas.microsoft.com/office/drawing/2010/main">
-        <mc:Choice Requires="a14">
+      <mc:AlternateContent xmlns:mc="http://schemas.openxmlformats.org/markup-compatibility/2006">
+        <mc:Choice xmlns:a14="http://schemas.microsoft.com/office/drawing/2010/main" Requires="a14">
           <p:sp>
             <p:nvSpPr>
               <p:cNvPr id="3" name="Content Placeholder 2">
@@ -28481,7 +28441,19 @@
                   <a:rPr lang="en-US" sz="1800" dirty="0">
                     <a:latin typeface="+mj-lt"/>
                   </a:rPr>
-                  <a:t> distinct, non-overlapping, clusters</a:t>
+                  <a:t> distinct, </a:t>
+                </a:r>
+                <a:r>
+                  <a:rPr lang="en-US" sz="1800" b="1" dirty="0">
+                    <a:latin typeface="+mj-lt"/>
+                  </a:rPr>
+                  <a:t>non-overlapping</a:t>
+                </a:r>
+                <a:r>
+                  <a:rPr lang="en-US" sz="1800" dirty="0">
+                    <a:latin typeface="+mj-lt"/>
+                  </a:rPr>
+                  <a:t>, clusters</a:t>
                 </a:r>
               </a:p>
               <a:p>
@@ -28701,7 +28673,7 @@
                   <a:rPr lang="en-US" sz="1800" dirty="0">
                     <a:latin typeface="+mj-lt"/>
                   </a:rPr>
-                  <a:t>of the extent the observations in a cluster differ from each other. Hence, we want to minimize:</a:t>
+                  <a:t> of the extent the observations in a cluster differ from each other. Hence, we want to minimize:</a:t>
                 </a:r>
               </a:p>
               <a:p>
@@ -28911,7 +28883,7 @@
             </p:txBody>
           </p:sp>
         </mc:Choice>
-        <mc:Fallback xmlns="">
+        <mc:Fallback>
           <p:sp>
             <p:nvSpPr>
               <p:cNvPr id="3" name="Content Placeholder 2">
@@ -31156,7 +31128,7 @@
               <a:rPr lang="en-US" sz="2000" dirty="0">
                 <a:latin typeface="+mj-lt"/>
               </a:rPr>
-              <a:t>keeping the best solution. The best solution that with the lowest </a:t>
+              <a:t>keeping the best solution. The best solution is that with the lowest </a:t>
             </a:r>
             <a:r>
               <a:rPr lang="en-US" sz="2000" b="1" i="1" dirty="0">
@@ -32102,65 +32074,6 @@
       </p:sp>
       <p:sp>
         <p:nvSpPr>
-          <p:cNvPr id="3" name="Content Placeholder 2">
-            <a:extLst>
-              <a:ext uri="{FF2B5EF4-FFF2-40B4-BE49-F238E27FC236}">
-                <a16:creationId xmlns:a16="http://schemas.microsoft.com/office/drawing/2014/main" id="{068F0C39-44FF-99B2-7103-C6D38F774B5B}"/>
-              </a:ext>
-            </a:extLst>
-          </p:cNvPr>
-          <p:cNvSpPr>
-            <a:spLocks noGrp="1"/>
-          </p:cNvSpPr>
-          <p:nvPr>
-            <p:ph idx="1"/>
-          </p:nvPr>
-        </p:nvSpPr>
-        <p:spPr/>
-        <p:txBody>
-          <a:bodyPr>
-            <a:normAutofit/>
-          </a:bodyPr>
-          <a:lstStyle/>
-          <a:p>
-            <a:pPr>
-              <a:lnSpc>
-                <a:spcPct val="150000"/>
-              </a:lnSpc>
-              <a:buFont typeface="Wingdings" panose="05000000000000000000" pitchFamily="2" charset="2"/>
-              <a:buChar char="§"/>
-            </a:pPr>
-            <a:r>
-              <a:rPr lang="en-US" sz="2000" dirty="0">
-                <a:latin typeface="+mj-lt"/>
-              </a:rPr>
-              <a:t>This is called the </a:t>
-            </a:r>
-            <a:r>
-              <a:rPr lang="en-US" sz="2000" i="1" dirty="0">
-                <a:latin typeface="+mj-lt"/>
-              </a:rPr>
-              <a:t>elbow method</a:t>
-            </a:r>
-            <a:endParaRPr lang="en-US" sz="2000" dirty="0">
-              <a:latin typeface="+mj-lt"/>
-            </a:endParaRPr>
-          </a:p>
-          <a:p>
-            <a:pPr marL="0" indent="0">
-              <a:lnSpc>
-                <a:spcPct val="150000"/>
-              </a:lnSpc>
-              <a:buNone/>
-            </a:pPr>
-            <a:endParaRPr lang="en-US" sz="2000" dirty="0">
-              <a:latin typeface="+mj-lt"/>
-            </a:endParaRPr>
-          </a:p>
-        </p:txBody>
-      </p:sp>
-      <p:sp>
-        <p:nvSpPr>
           <p:cNvPr id="4" name="Rectángulo 3">
             <a:extLst>
               <a:ext uri="{FF2B5EF4-FFF2-40B4-BE49-F238E27FC236}">
@@ -32522,8 +32435,8 @@
         </p:blipFill>
         <p:spPr>
           <a:xfrm>
-            <a:off x="3025743" y="3105764"/>
-            <a:ext cx="6140513" cy="2470714"/>
+            <a:off x="2531061" y="2670745"/>
+            <a:ext cx="6798426" cy="2735434"/>
           </a:xfrm>
           <a:prstGeom prst="rect">
             <a:avLst/>

--- a/Course content/Slides/Topic 8 - Clustering.pptx
+++ b/Course content/Slides/Topic 8 - Clustering.pptx
@@ -224,7 +224,7 @@
           <a:p>
             <a:fld id="{B9B1DC7F-8587-4047-9A5D-1FCB6614CAE0}" type="datetimeFigureOut">
               <a:rPr lang="en-US" smtClean="0"/>
-              <a:t>11/15/2022</a:t>
+              <a:t>11/16/2022</a:t>
             </a:fld>
             <a:endParaRPr lang="en-US"/>
           </a:p>
@@ -638,7 +638,7 @@
           <a:p>
             <a:fld id="{A7DB5662-7327-465C-9A70-AD96B7A8D67A}" type="datetimeFigureOut">
               <a:rPr lang="en-US" smtClean="0"/>
-              <a:t>11/15/2022</a:t>
+              <a:t>11/16/2022</a:t>
             </a:fld>
             <a:endParaRPr lang="en-US"/>
           </a:p>
@@ -836,7 +836,7 @@
           <a:p>
             <a:fld id="{A7DB5662-7327-465C-9A70-AD96B7A8D67A}" type="datetimeFigureOut">
               <a:rPr lang="en-US" smtClean="0"/>
-              <a:t>11/15/2022</a:t>
+              <a:t>11/16/2022</a:t>
             </a:fld>
             <a:endParaRPr lang="en-US"/>
           </a:p>
@@ -1044,7 +1044,7 @@
           <a:p>
             <a:fld id="{A7DB5662-7327-465C-9A70-AD96B7A8D67A}" type="datetimeFigureOut">
               <a:rPr lang="en-US" smtClean="0"/>
-              <a:t>11/15/2022</a:t>
+              <a:t>11/16/2022</a:t>
             </a:fld>
             <a:endParaRPr lang="en-US"/>
           </a:p>
@@ -1242,7 +1242,7 @@
           <a:p>
             <a:fld id="{A7DB5662-7327-465C-9A70-AD96B7A8D67A}" type="datetimeFigureOut">
               <a:rPr lang="en-US" smtClean="0"/>
-              <a:t>11/15/2022</a:t>
+              <a:t>11/16/2022</a:t>
             </a:fld>
             <a:endParaRPr lang="en-US"/>
           </a:p>
@@ -1517,7 +1517,7 @@
           <a:p>
             <a:fld id="{A7DB5662-7327-465C-9A70-AD96B7A8D67A}" type="datetimeFigureOut">
               <a:rPr lang="en-US" smtClean="0"/>
-              <a:t>11/15/2022</a:t>
+              <a:t>11/16/2022</a:t>
             </a:fld>
             <a:endParaRPr lang="en-US"/>
           </a:p>
@@ -1782,7 +1782,7 @@
           <a:p>
             <a:fld id="{A7DB5662-7327-465C-9A70-AD96B7A8D67A}" type="datetimeFigureOut">
               <a:rPr lang="en-US" smtClean="0"/>
-              <a:t>11/15/2022</a:t>
+              <a:t>11/16/2022</a:t>
             </a:fld>
             <a:endParaRPr lang="en-US"/>
           </a:p>
@@ -2194,7 +2194,7 @@
           <a:p>
             <a:fld id="{A7DB5662-7327-465C-9A70-AD96B7A8D67A}" type="datetimeFigureOut">
               <a:rPr lang="en-US" smtClean="0"/>
-              <a:t>11/15/2022</a:t>
+              <a:t>11/16/2022</a:t>
             </a:fld>
             <a:endParaRPr lang="en-US"/>
           </a:p>
@@ -2335,7 +2335,7 @@
           <a:p>
             <a:fld id="{A7DB5662-7327-465C-9A70-AD96B7A8D67A}" type="datetimeFigureOut">
               <a:rPr lang="en-US" smtClean="0"/>
-              <a:t>11/15/2022</a:t>
+              <a:t>11/16/2022</a:t>
             </a:fld>
             <a:endParaRPr lang="en-US"/>
           </a:p>
@@ -2448,7 +2448,7 @@
           <a:p>
             <a:fld id="{A7DB5662-7327-465C-9A70-AD96B7A8D67A}" type="datetimeFigureOut">
               <a:rPr lang="en-US" smtClean="0"/>
-              <a:t>11/15/2022</a:t>
+              <a:t>11/16/2022</a:t>
             </a:fld>
             <a:endParaRPr lang="en-US"/>
           </a:p>
@@ -2759,7 +2759,7 @@
           <a:p>
             <a:fld id="{A7DB5662-7327-465C-9A70-AD96B7A8D67A}" type="datetimeFigureOut">
               <a:rPr lang="en-US" smtClean="0"/>
-              <a:t>11/15/2022</a:t>
+              <a:t>11/16/2022</a:t>
             </a:fld>
             <a:endParaRPr lang="en-US"/>
           </a:p>
@@ -3047,7 +3047,7 @@
           <a:p>
             <a:fld id="{A7DB5662-7327-465C-9A70-AD96B7A8D67A}" type="datetimeFigureOut">
               <a:rPr lang="en-US" smtClean="0"/>
-              <a:t>11/15/2022</a:t>
+              <a:t>11/16/2022</a:t>
             </a:fld>
             <a:endParaRPr lang="en-US"/>
           </a:p>
@@ -3288,7 +3288,7 @@
           <a:p>
             <a:fld id="{A7DB5662-7327-465C-9A70-AD96B7A8D67A}" type="datetimeFigureOut">
               <a:rPr lang="en-US" smtClean="0"/>
-              <a:t>11/15/2022</a:t>
+              <a:t>11/16/2022</a:t>
             </a:fld>
             <a:endParaRPr lang="en-US"/>
           </a:p>
@@ -21692,8 +21692,8 @@
           </a:p>
         </p:txBody>
       </p:sp>
-      <mc:AlternateContent xmlns:mc="http://schemas.openxmlformats.org/markup-compatibility/2006">
-        <mc:Choice xmlns:a14="http://schemas.microsoft.com/office/drawing/2010/main" Requires="a14">
+      <mc:AlternateContent xmlns:mc="http://schemas.openxmlformats.org/markup-compatibility/2006" xmlns:a14="http://schemas.microsoft.com/office/drawing/2010/main">
+        <mc:Choice Requires="a14">
           <p:sp>
             <p:nvSpPr>
               <p:cNvPr id="3" name="Content Placeholder 2">
@@ -21977,7 +21977,7 @@
             </p:txBody>
           </p:sp>
         </mc:Choice>
-        <mc:Fallback>
+        <mc:Fallback xmlns="">
           <p:sp>
             <p:nvSpPr>
               <p:cNvPr id="3" name="Content Placeholder 2">
@@ -26971,7 +26971,7 @@
               <a:rPr lang="en-US" sz="2000" dirty="0">
                 <a:latin typeface="+mj-lt"/>
               </a:rPr>
-              <a:t>DBSCAN</a:t>
+              <a:t>DBSCAN: Defines clusters as continuous regions of high density. This is, if there are regions with no data, and other regions with a high concentration of data</a:t>
             </a:r>
           </a:p>
           <a:p>
@@ -26986,7 +26986,7 @@
               <a:rPr lang="en-US" sz="2000" dirty="0">
                 <a:latin typeface="+mj-lt"/>
               </a:rPr>
-              <a:t>BIRCH</a:t>
+              <a:t>BIRCH: Suitable for very large datasets with just a few features</a:t>
             </a:r>
           </a:p>
           <a:p>
@@ -27001,7 +27001,7 @@
               <a:rPr lang="en-US" sz="2000" dirty="0">
                 <a:latin typeface="+mj-lt"/>
               </a:rPr>
-              <a:t>Mean-shift</a:t>
+              <a:t>Mean-shift: Groups observations in circles of high density. Not suitable for large datasets</a:t>
             </a:r>
           </a:p>
           <a:p>
@@ -27016,7 +27016,7 @@
               <a:rPr lang="en-US" sz="2000" dirty="0">
                 <a:latin typeface="+mj-lt"/>
               </a:rPr>
-              <a:t>Affinity propagation</a:t>
+              <a:t>Affinity propagation: Uses a voting system. Not suitable for large datasets</a:t>
             </a:r>
           </a:p>
           <a:p>
@@ -27031,8 +27031,32 @@
               <a:rPr lang="en-US" sz="2000" dirty="0">
                 <a:latin typeface="+mj-lt"/>
               </a:rPr>
-              <a:t>Spectral clustering</a:t>
+              <a:t>Spectral clustering: Applies a dimensionality reduction and then applies another clustering algorithm to that space</a:t>
             </a:r>
+          </a:p>
+          <a:p>
+            <a:pPr>
+              <a:lnSpc>
+                <a:spcPct val="150000"/>
+              </a:lnSpc>
+              <a:buFont typeface="Wingdings" panose="05000000000000000000" pitchFamily="2" charset="2"/>
+              <a:buChar char="§"/>
+            </a:pPr>
+            <a:r>
+              <a:rPr lang="en-US" sz="2000" dirty="0">
+                <a:latin typeface="+mj-lt"/>
+              </a:rPr>
+              <a:t>Gaussian mixture: Appropriate for </a:t>
+            </a:r>
+            <a:r>
+              <a:rPr lang="en-US" sz="2000">
+                <a:latin typeface="+mj-lt"/>
+              </a:rPr>
+              <a:t>ellipsoidal clusters</a:t>
+            </a:r>
+            <a:endParaRPr lang="en-US" sz="2000" dirty="0">
+              <a:latin typeface="+mj-lt"/>
+            </a:endParaRPr>
           </a:p>
         </p:txBody>
       </p:sp>
@@ -28387,8 +28411,8 @@
           </a:p>
         </p:txBody>
       </p:sp>
-      <mc:AlternateContent xmlns:mc="http://schemas.openxmlformats.org/markup-compatibility/2006">
-        <mc:Choice xmlns:a14="http://schemas.microsoft.com/office/drawing/2010/main" Requires="a14">
+      <mc:AlternateContent xmlns:mc="http://schemas.openxmlformats.org/markup-compatibility/2006" xmlns:a14="http://schemas.microsoft.com/office/drawing/2010/main">
+        <mc:Choice Requires="a14">
           <p:sp>
             <p:nvSpPr>
               <p:cNvPr id="3" name="Content Placeholder 2">
@@ -28883,7 +28907,7 @@
             </p:txBody>
           </p:sp>
         </mc:Choice>
-        <mc:Fallback>
+        <mc:Fallback xmlns="">
           <p:sp>
             <p:nvSpPr>
               <p:cNvPr id="3" name="Content Placeholder 2">

--- a/Course content/Slides/Topic 8 - Clustering.pptx
+++ b/Course content/Slides/Topic 8 - Clustering.pptx
@@ -142,6 +142,208 @@
 </p:presentation>
 </file>
 
+<file path=ppt/revisionInfo.xml><?xml version="1.0" encoding="utf-8"?>
+<p1510:revInfo xmlns:a="http://schemas.openxmlformats.org/drawingml/2006/main" xmlns:r="http://schemas.openxmlformats.org/officeDocument/2006/relationships" xmlns:p1510="http://schemas.microsoft.com/office/powerpoint/2015/10/main">
+  <p1510:revLst>
+    <p1510:client id="{AA8D9646-DA1F-465B-8718-46D21D0E85AB}" v="4" dt="2023-11-21T10:00:55.766"/>
+  </p1510:revLst>
+</p1510:revInfo>
+</file>
+
+<file path=ppt/changesInfos/changesInfo1.xml><?xml version="1.0" encoding="utf-8"?>
+<pc:chgInfo xmlns:a="http://schemas.openxmlformats.org/drawingml/2006/main" xmlns:r="http://schemas.openxmlformats.org/officeDocument/2006/relationships" xmlns:ac="http://schemas.microsoft.com/office/drawing/2013/main/command" xmlns:pc="http://schemas.microsoft.com/office/powerpoint/2013/main/command">
+  <pc:docChgLst>
+    <pc:chgData name="Javier Bas Vicente" userId="96bf8a96-3310-496c-8c7e-8a087f977faa" providerId="ADAL" clId="{AA8D9646-DA1F-465B-8718-46D21D0E85AB}"/>
+    <pc:docChg chg="undo custSel modSld">
+      <pc:chgData name="Javier Bas Vicente" userId="96bf8a96-3310-496c-8c7e-8a087f977faa" providerId="ADAL" clId="{AA8D9646-DA1F-465B-8718-46D21D0E85AB}" dt="2023-11-21T10:04:23.203" v="254" actId="113"/>
+      <pc:docMkLst>
+        <pc:docMk/>
+      </pc:docMkLst>
+      <pc:sldChg chg="modSp mod">
+        <pc:chgData name="Javier Bas Vicente" userId="96bf8a96-3310-496c-8c7e-8a087f977faa" providerId="ADAL" clId="{AA8D9646-DA1F-465B-8718-46D21D0E85AB}" dt="2023-11-21T09:12:30.733" v="1" actId="20577"/>
+        <pc:sldMkLst>
+          <pc:docMk/>
+          <pc:sldMk cId="3761768786" sldId="258"/>
+        </pc:sldMkLst>
+        <pc:spChg chg="mod">
+          <ac:chgData name="Javier Bas Vicente" userId="96bf8a96-3310-496c-8c7e-8a087f977faa" providerId="ADAL" clId="{AA8D9646-DA1F-465B-8718-46D21D0E85AB}" dt="2023-11-21T09:12:30.733" v="1" actId="20577"/>
+          <ac:spMkLst>
+            <pc:docMk/>
+            <pc:sldMk cId="3761768786" sldId="258"/>
+            <ac:spMk id="3" creationId="{068F0C39-44FF-99B2-7103-C6D38F774B5B}"/>
+          </ac:spMkLst>
+        </pc:spChg>
+      </pc:sldChg>
+      <pc:sldChg chg="modSp mod">
+        <pc:chgData name="Javier Bas Vicente" userId="96bf8a96-3310-496c-8c7e-8a087f977faa" providerId="ADAL" clId="{AA8D9646-DA1F-465B-8718-46D21D0E85AB}" dt="2023-11-21T09:41:30.809" v="5" actId="20577"/>
+        <pc:sldMkLst>
+          <pc:docMk/>
+          <pc:sldMk cId="2565555265" sldId="280"/>
+        </pc:sldMkLst>
+        <pc:spChg chg="mod">
+          <ac:chgData name="Javier Bas Vicente" userId="96bf8a96-3310-496c-8c7e-8a087f977faa" providerId="ADAL" clId="{AA8D9646-DA1F-465B-8718-46D21D0E85AB}" dt="2023-11-21T09:41:30.809" v="5" actId="20577"/>
+          <ac:spMkLst>
+            <pc:docMk/>
+            <pc:sldMk cId="2565555265" sldId="280"/>
+            <ac:spMk id="3" creationId="{068F0C39-44FF-99B2-7103-C6D38F774B5B}"/>
+          </ac:spMkLst>
+        </pc:spChg>
+      </pc:sldChg>
+      <pc:sldChg chg="modSp mod">
+        <pc:chgData name="Javier Bas Vicente" userId="96bf8a96-3310-496c-8c7e-8a087f977faa" providerId="ADAL" clId="{AA8D9646-DA1F-465B-8718-46D21D0E85AB}" dt="2023-11-21T09:41:25.946" v="3" actId="20577"/>
+        <pc:sldMkLst>
+          <pc:docMk/>
+          <pc:sldMk cId="2587470454" sldId="281"/>
+        </pc:sldMkLst>
+        <pc:spChg chg="mod">
+          <ac:chgData name="Javier Bas Vicente" userId="96bf8a96-3310-496c-8c7e-8a087f977faa" providerId="ADAL" clId="{AA8D9646-DA1F-465B-8718-46D21D0E85AB}" dt="2023-11-21T09:41:25.946" v="3" actId="20577"/>
+          <ac:spMkLst>
+            <pc:docMk/>
+            <pc:sldMk cId="2587470454" sldId="281"/>
+            <ac:spMk id="3" creationId="{068F0C39-44FF-99B2-7103-C6D38F774B5B}"/>
+          </ac:spMkLst>
+        </pc:spChg>
+      </pc:sldChg>
+      <pc:sldChg chg="modSp mod">
+        <pc:chgData name="Javier Bas Vicente" userId="96bf8a96-3310-496c-8c7e-8a087f977faa" providerId="ADAL" clId="{AA8D9646-DA1F-465B-8718-46D21D0E85AB}" dt="2023-11-21T09:42:09.294" v="11" actId="20577"/>
+        <pc:sldMkLst>
+          <pc:docMk/>
+          <pc:sldMk cId="4030116933" sldId="283"/>
+        </pc:sldMkLst>
+        <pc:spChg chg="mod">
+          <ac:chgData name="Javier Bas Vicente" userId="96bf8a96-3310-496c-8c7e-8a087f977faa" providerId="ADAL" clId="{AA8D9646-DA1F-465B-8718-46D21D0E85AB}" dt="2023-11-21T09:42:09.294" v="11" actId="20577"/>
+          <ac:spMkLst>
+            <pc:docMk/>
+            <pc:sldMk cId="4030116933" sldId="283"/>
+            <ac:spMk id="3" creationId="{068F0C39-44FF-99B2-7103-C6D38F774B5B}"/>
+          </ac:spMkLst>
+        </pc:spChg>
+      </pc:sldChg>
+      <pc:sldChg chg="modSp mod">
+        <pc:chgData name="Javier Bas Vicente" userId="96bf8a96-3310-496c-8c7e-8a087f977faa" providerId="ADAL" clId="{AA8D9646-DA1F-465B-8718-46D21D0E85AB}" dt="2023-11-21T09:44:40.547" v="32" actId="20577"/>
+        <pc:sldMkLst>
+          <pc:docMk/>
+          <pc:sldMk cId="2871721075" sldId="284"/>
+        </pc:sldMkLst>
+        <pc:spChg chg="mod">
+          <ac:chgData name="Javier Bas Vicente" userId="96bf8a96-3310-496c-8c7e-8a087f977faa" providerId="ADAL" clId="{AA8D9646-DA1F-465B-8718-46D21D0E85AB}" dt="2023-11-21T09:44:40.547" v="32" actId="20577"/>
+          <ac:spMkLst>
+            <pc:docMk/>
+            <pc:sldMk cId="2871721075" sldId="284"/>
+            <ac:spMk id="3" creationId="{068F0C39-44FF-99B2-7103-C6D38F774B5B}"/>
+          </ac:spMkLst>
+        </pc:spChg>
+      </pc:sldChg>
+      <pc:sldChg chg="modSp mod">
+        <pc:chgData name="Javier Bas Vicente" userId="96bf8a96-3310-496c-8c7e-8a087f977faa" providerId="ADAL" clId="{AA8D9646-DA1F-465B-8718-46D21D0E85AB}" dt="2023-11-21T10:01:03.242" v="149" actId="20577"/>
+        <pc:sldMkLst>
+          <pc:docMk/>
+          <pc:sldMk cId="4008990077" sldId="286"/>
+        </pc:sldMkLst>
+        <pc:spChg chg="mod">
+          <ac:chgData name="Javier Bas Vicente" userId="96bf8a96-3310-496c-8c7e-8a087f977faa" providerId="ADAL" clId="{AA8D9646-DA1F-465B-8718-46D21D0E85AB}" dt="2023-11-21T10:01:03.242" v="149" actId="20577"/>
+          <ac:spMkLst>
+            <pc:docMk/>
+            <pc:sldMk cId="4008990077" sldId="286"/>
+            <ac:spMk id="3" creationId="{068F0C39-44FF-99B2-7103-C6D38F774B5B}"/>
+          </ac:spMkLst>
+        </pc:spChg>
+      </pc:sldChg>
+      <pc:sldChg chg="addSp modSp mod">
+        <pc:chgData name="Javier Bas Vicente" userId="96bf8a96-3310-496c-8c7e-8a087f977faa" providerId="ADAL" clId="{AA8D9646-DA1F-465B-8718-46D21D0E85AB}" dt="2023-11-21T09:56:45.966" v="140" actId="20577"/>
+        <pc:sldMkLst>
+          <pc:docMk/>
+          <pc:sldMk cId="1298617955" sldId="287"/>
+        </pc:sldMkLst>
+        <pc:spChg chg="add mod">
+          <ac:chgData name="Javier Bas Vicente" userId="96bf8a96-3310-496c-8c7e-8a087f977faa" providerId="ADAL" clId="{AA8D9646-DA1F-465B-8718-46D21D0E85AB}" dt="2023-11-21T09:56:45.966" v="140" actId="20577"/>
+          <ac:spMkLst>
+            <pc:docMk/>
+            <pc:sldMk cId="1298617955" sldId="287"/>
+            <ac:spMk id="3" creationId="{F66684D9-2FA2-595F-63C8-7D7A09EEEFD1}"/>
+          </ac:spMkLst>
+        </pc:spChg>
+      </pc:sldChg>
+      <pc:sldChg chg="modSp mod">
+        <pc:chgData name="Javier Bas Vicente" userId="96bf8a96-3310-496c-8c7e-8a087f977faa" providerId="ADAL" clId="{AA8D9646-DA1F-465B-8718-46D21D0E85AB}" dt="2023-11-21T10:01:06.700" v="151" actId="20577"/>
+        <pc:sldMkLst>
+          <pc:docMk/>
+          <pc:sldMk cId="68714175" sldId="288"/>
+        </pc:sldMkLst>
+        <pc:spChg chg="mod">
+          <ac:chgData name="Javier Bas Vicente" userId="96bf8a96-3310-496c-8c7e-8a087f977faa" providerId="ADAL" clId="{AA8D9646-DA1F-465B-8718-46D21D0E85AB}" dt="2023-11-21T10:01:06.700" v="151" actId="20577"/>
+          <ac:spMkLst>
+            <pc:docMk/>
+            <pc:sldMk cId="68714175" sldId="288"/>
+            <ac:spMk id="3" creationId="{068F0C39-44FF-99B2-7103-C6D38F774B5B}"/>
+          </ac:spMkLst>
+        </pc:spChg>
+      </pc:sldChg>
+      <pc:sldChg chg="modSp mod">
+        <pc:chgData name="Javier Bas Vicente" userId="96bf8a96-3310-496c-8c7e-8a087f977faa" providerId="ADAL" clId="{AA8D9646-DA1F-465B-8718-46D21D0E85AB}" dt="2023-11-21T10:01:14.083" v="155" actId="20577"/>
+        <pc:sldMkLst>
+          <pc:docMk/>
+          <pc:sldMk cId="1442795502" sldId="290"/>
+        </pc:sldMkLst>
+        <pc:spChg chg="mod">
+          <ac:chgData name="Javier Bas Vicente" userId="96bf8a96-3310-496c-8c7e-8a087f977faa" providerId="ADAL" clId="{AA8D9646-DA1F-465B-8718-46D21D0E85AB}" dt="2023-11-21T10:01:14.083" v="155" actId="20577"/>
+          <ac:spMkLst>
+            <pc:docMk/>
+            <pc:sldMk cId="1442795502" sldId="290"/>
+            <ac:spMk id="5" creationId="{E2BE11E3-AE06-6925-6A25-8C6EA52D7DEC}"/>
+          </ac:spMkLst>
+        </pc:spChg>
+      </pc:sldChg>
+      <pc:sldChg chg="modSp mod">
+        <pc:chgData name="Javier Bas Vicente" userId="96bf8a96-3310-496c-8c7e-8a087f977faa" providerId="ADAL" clId="{AA8D9646-DA1F-465B-8718-46D21D0E85AB}" dt="2023-11-21T10:02:11.957" v="163" actId="20577"/>
+        <pc:sldMkLst>
+          <pc:docMk/>
+          <pc:sldMk cId="885786092" sldId="291"/>
+        </pc:sldMkLst>
+        <pc:spChg chg="mod">
+          <ac:chgData name="Javier Bas Vicente" userId="96bf8a96-3310-496c-8c7e-8a087f977faa" providerId="ADAL" clId="{AA8D9646-DA1F-465B-8718-46D21D0E85AB}" dt="2023-11-21T10:02:11.957" v="163" actId="20577"/>
+          <ac:spMkLst>
+            <pc:docMk/>
+            <pc:sldMk cId="885786092" sldId="291"/>
+            <ac:spMk id="5" creationId="{E2BE11E3-AE06-6925-6A25-8C6EA52D7DEC}"/>
+          </ac:spMkLst>
+        </pc:spChg>
+      </pc:sldChg>
+      <pc:sldChg chg="modSp mod">
+        <pc:chgData name="Javier Bas Vicente" userId="96bf8a96-3310-496c-8c7e-8a087f977faa" providerId="ADAL" clId="{AA8D9646-DA1F-465B-8718-46D21D0E85AB}" dt="2023-11-21T10:02:49.126" v="243" actId="20577"/>
+        <pc:sldMkLst>
+          <pc:docMk/>
+          <pc:sldMk cId="142238196" sldId="292"/>
+        </pc:sldMkLst>
+        <pc:spChg chg="mod">
+          <ac:chgData name="Javier Bas Vicente" userId="96bf8a96-3310-496c-8c7e-8a087f977faa" providerId="ADAL" clId="{AA8D9646-DA1F-465B-8718-46D21D0E85AB}" dt="2023-11-21T10:02:49.126" v="243" actId="20577"/>
+          <ac:spMkLst>
+            <pc:docMk/>
+            <pc:sldMk cId="142238196" sldId="292"/>
+            <ac:spMk id="14" creationId="{9A747A97-60F8-9BA4-E12B-345CDE22A582}"/>
+          </ac:spMkLst>
+        </pc:spChg>
+      </pc:sldChg>
+      <pc:sldChg chg="modSp mod">
+        <pc:chgData name="Javier Bas Vicente" userId="96bf8a96-3310-496c-8c7e-8a087f977faa" providerId="ADAL" clId="{AA8D9646-DA1F-465B-8718-46D21D0E85AB}" dt="2023-11-21T10:04:23.203" v="254" actId="113"/>
+        <pc:sldMkLst>
+          <pc:docMk/>
+          <pc:sldMk cId="2799877309" sldId="293"/>
+        </pc:sldMkLst>
+        <pc:spChg chg="mod">
+          <ac:chgData name="Javier Bas Vicente" userId="96bf8a96-3310-496c-8c7e-8a087f977faa" providerId="ADAL" clId="{AA8D9646-DA1F-465B-8718-46D21D0E85AB}" dt="2023-11-21T10:04:23.203" v="254" actId="113"/>
+          <ac:spMkLst>
+            <pc:docMk/>
+            <pc:sldMk cId="2799877309" sldId="293"/>
+            <ac:spMk id="5" creationId="{E2BE11E3-AE06-6925-6A25-8C6EA52D7DEC}"/>
+          </ac:spMkLst>
+        </pc:spChg>
+      </pc:sldChg>
+    </pc:docChg>
+  </pc:docChgLst>
+</pc:chgInfo>
+</file>
+
 <file path=ppt/notesMasters/notesMaster1.xml><?xml version="1.0" encoding="utf-8"?>
 <p:notesMaster xmlns:a="http://schemas.openxmlformats.org/drawingml/2006/main" xmlns:r="http://schemas.openxmlformats.org/officeDocument/2006/relationships" xmlns:p="http://schemas.openxmlformats.org/presentationml/2006/main">
   <p:cSld>
@@ -224,7 +426,7 @@
           <a:p>
             <a:fld id="{B9B1DC7F-8587-4047-9A5D-1FCB6614CAE0}" type="datetimeFigureOut">
               <a:rPr lang="en-US" smtClean="0"/>
-              <a:t>11/16/2022</a:t>
+              <a:t>11/21/2023</a:t>
             </a:fld>
             <a:endParaRPr lang="en-US"/>
           </a:p>
@@ -638,7 +840,7 @@
           <a:p>
             <a:fld id="{A7DB5662-7327-465C-9A70-AD96B7A8D67A}" type="datetimeFigureOut">
               <a:rPr lang="en-US" smtClean="0"/>
-              <a:t>11/16/2022</a:t>
+              <a:t>11/21/2023</a:t>
             </a:fld>
             <a:endParaRPr lang="en-US"/>
           </a:p>
@@ -836,7 +1038,7 @@
           <a:p>
             <a:fld id="{A7DB5662-7327-465C-9A70-AD96B7A8D67A}" type="datetimeFigureOut">
               <a:rPr lang="en-US" smtClean="0"/>
-              <a:t>11/16/2022</a:t>
+              <a:t>11/21/2023</a:t>
             </a:fld>
             <a:endParaRPr lang="en-US"/>
           </a:p>
@@ -1044,7 +1246,7 @@
           <a:p>
             <a:fld id="{A7DB5662-7327-465C-9A70-AD96B7A8D67A}" type="datetimeFigureOut">
               <a:rPr lang="en-US" smtClean="0"/>
-              <a:t>11/16/2022</a:t>
+              <a:t>11/21/2023</a:t>
             </a:fld>
             <a:endParaRPr lang="en-US"/>
           </a:p>
@@ -1242,7 +1444,7 @@
           <a:p>
             <a:fld id="{A7DB5662-7327-465C-9A70-AD96B7A8D67A}" type="datetimeFigureOut">
               <a:rPr lang="en-US" smtClean="0"/>
-              <a:t>11/16/2022</a:t>
+              <a:t>11/21/2023</a:t>
             </a:fld>
             <a:endParaRPr lang="en-US"/>
           </a:p>
@@ -1517,7 +1719,7 @@
           <a:p>
             <a:fld id="{A7DB5662-7327-465C-9A70-AD96B7A8D67A}" type="datetimeFigureOut">
               <a:rPr lang="en-US" smtClean="0"/>
-              <a:t>11/16/2022</a:t>
+              <a:t>11/21/2023</a:t>
             </a:fld>
             <a:endParaRPr lang="en-US"/>
           </a:p>
@@ -1782,7 +1984,7 @@
           <a:p>
             <a:fld id="{A7DB5662-7327-465C-9A70-AD96B7A8D67A}" type="datetimeFigureOut">
               <a:rPr lang="en-US" smtClean="0"/>
-              <a:t>11/16/2022</a:t>
+              <a:t>11/21/2023</a:t>
             </a:fld>
             <a:endParaRPr lang="en-US"/>
           </a:p>
@@ -2194,7 +2396,7 @@
           <a:p>
             <a:fld id="{A7DB5662-7327-465C-9A70-AD96B7A8D67A}" type="datetimeFigureOut">
               <a:rPr lang="en-US" smtClean="0"/>
-              <a:t>11/16/2022</a:t>
+              <a:t>11/21/2023</a:t>
             </a:fld>
             <a:endParaRPr lang="en-US"/>
           </a:p>
@@ -2335,7 +2537,7 @@
           <a:p>
             <a:fld id="{A7DB5662-7327-465C-9A70-AD96B7A8D67A}" type="datetimeFigureOut">
               <a:rPr lang="en-US" smtClean="0"/>
-              <a:t>11/16/2022</a:t>
+              <a:t>11/21/2023</a:t>
             </a:fld>
             <a:endParaRPr lang="en-US"/>
           </a:p>
@@ -2448,7 +2650,7 @@
           <a:p>
             <a:fld id="{A7DB5662-7327-465C-9A70-AD96B7A8D67A}" type="datetimeFigureOut">
               <a:rPr lang="en-US" smtClean="0"/>
-              <a:t>11/16/2022</a:t>
+              <a:t>11/21/2023</a:t>
             </a:fld>
             <a:endParaRPr lang="en-US"/>
           </a:p>
@@ -2759,7 +2961,7 @@
           <a:p>
             <a:fld id="{A7DB5662-7327-465C-9A70-AD96B7A8D67A}" type="datetimeFigureOut">
               <a:rPr lang="en-US" smtClean="0"/>
-              <a:t>11/16/2022</a:t>
+              <a:t>11/21/2023</a:t>
             </a:fld>
             <a:endParaRPr lang="en-US"/>
           </a:p>
@@ -3047,7 +3249,7 @@
           <a:p>
             <a:fld id="{A7DB5662-7327-465C-9A70-AD96B7A8D67A}" type="datetimeFigureOut">
               <a:rPr lang="en-US" smtClean="0"/>
-              <a:t>11/16/2022</a:t>
+              <a:t>11/21/2023</a:t>
             </a:fld>
             <a:endParaRPr lang="en-US"/>
           </a:p>
@@ -3288,7 +3490,7 @@
           <a:p>
             <a:fld id="{A7DB5662-7327-465C-9A70-AD96B7A8D67A}" type="datetimeFigureOut">
               <a:rPr lang="en-US" smtClean="0"/>
-              <a:t>11/16/2022</a:t>
+              <a:t>11/21/2023</a:t>
             </a:fld>
             <a:endParaRPr lang="en-US"/>
           </a:p>
@@ -21692,8 +21894,8 @@
           </a:p>
         </p:txBody>
       </p:sp>
-      <mc:AlternateContent xmlns:mc="http://schemas.openxmlformats.org/markup-compatibility/2006" xmlns:a14="http://schemas.microsoft.com/office/drawing/2010/main">
-        <mc:Choice Requires="a14">
+      <mc:AlternateContent xmlns:mc="http://schemas.openxmlformats.org/markup-compatibility/2006">
+        <mc:Choice xmlns:a14="http://schemas.microsoft.com/office/drawing/2010/main" Requires="a14">
           <p:sp>
             <p:nvSpPr>
               <p:cNvPr id="3" name="Content Placeholder 2">
@@ -21900,7 +22102,7 @@
                   <a:rPr lang="en-US" sz="2000" dirty="0">
                     <a:latin typeface="+mj-lt"/>
                   </a:rPr>
-                  <a:t>, the mean distance to the instances of the next closest cluster)</a:t>
+                  <a:t>, the mean distance to the instances of the next closest cluster).</a:t>
                 </a:r>
               </a:p>
               <a:p>
@@ -21915,7 +22117,7 @@
                   <a:rPr lang="en-US" sz="2000" dirty="0">
                     <a:latin typeface="+mj-lt"/>
                   </a:rPr>
-                  <a:t>The silhouette coefficient varies between -1 and +1</a:t>
+                  <a:t>The silhouette coefficient varies between -1 and +1:</a:t>
                 </a:r>
               </a:p>
               <a:p>
@@ -21930,7 +22132,7 @@
                   <a:rPr lang="en-US" sz="1600" dirty="0">
                     <a:latin typeface="+mj-lt"/>
                   </a:rPr>
-                  <a:t>A coefficient close to +1 means that the instance is well inside its own cluster and far from other clusters</a:t>
+                  <a:t>A coefficient close to +1 means that the instance is well inside its own cluster and far from other clusters.</a:t>
                 </a:r>
               </a:p>
               <a:p>
@@ -21945,7 +22147,7 @@
                   <a:rPr lang="en-US" sz="1600" dirty="0">
                     <a:latin typeface="+mj-lt"/>
                   </a:rPr>
-                  <a:t>A coefficient of 0 means that it is close to a cluster boundary</a:t>
+                  <a:t>A coefficient of 0 means that it is close to a cluster boundary.</a:t>
                 </a:r>
               </a:p>
               <a:p>
@@ -21960,7 +22162,7 @@
                   <a:rPr lang="en-US" sz="1600" dirty="0">
                     <a:latin typeface="+mj-lt"/>
                   </a:rPr>
-                  <a:t>A coefficient close to -1 means that the instance may have been assigned to the wrong cluster</a:t>
+                  <a:t>A coefficient close to -1 means that the instance may have been assigned to the wrong cluster.</a:t>
                 </a:r>
               </a:p>
               <a:p>
@@ -21977,7 +22179,7 @@
             </p:txBody>
           </p:sp>
         </mc:Choice>
-        <mc:Fallback xmlns="">
+        <mc:Fallback>
           <p:sp>
             <p:nvSpPr>
               <p:cNvPr id="3" name="Content Placeholder 2">
@@ -22787,6 +22989,182 @@
           </a:p>
         </p:txBody>
       </p:sp>
+      <p:sp>
+        <p:nvSpPr>
+          <p:cNvPr id="3" name="TextBox 2">
+            <a:extLst>
+              <a:ext uri="{FF2B5EF4-FFF2-40B4-BE49-F238E27FC236}">
+                <a16:creationId xmlns:a16="http://schemas.microsoft.com/office/drawing/2014/main" id="{F66684D9-2FA2-595F-63C8-7D7A09EEEFD1}"/>
+              </a:ext>
+            </a:extLst>
+          </p:cNvPr>
+          <p:cNvSpPr txBox="1"/>
+          <p:nvPr/>
+        </p:nvSpPr>
+        <p:spPr>
+          <a:xfrm>
+            <a:off x="725220" y="3136612"/>
+            <a:ext cx="1665711" cy="1323439"/>
+          </a:xfrm>
+          <a:prstGeom prst="rect">
+            <a:avLst/>
+          </a:prstGeom>
+          <a:noFill/>
+        </p:spPr>
+        <p:txBody>
+          <a:bodyPr wrap="square" rtlCol="0">
+            <a:spAutoFit/>
+          </a:bodyPr>
+          <a:lstStyle/>
+          <a:p>
+            <a:r>
+              <a:rPr lang="es-ES" sz="1600" dirty="0" err="1">
+                <a:solidFill>
+                  <a:srgbClr val="FF0000"/>
+                </a:solidFill>
+              </a:rPr>
+              <a:t>Remember</a:t>
+            </a:r>
+            <a:r>
+              <a:rPr lang="es-ES" sz="1600" dirty="0">
+                <a:solidFill>
+                  <a:srgbClr val="FF0000"/>
+                </a:solidFill>
+              </a:rPr>
+              <a:t>:</a:t>
+            </a:r>
+          </a:p>
+          <a:p>
+            <a:r>
+              <a:rPr lang="es-ES" sz="1600" dirty="0" err="1">
+                <a:solidFill>
+                  <a:srgbClr val="FF0000"/>
+                </a:solidFill>
+              </a:rPr>
+              <a:t>Silhouette</a:t>
+            </a:r>
+            <a:r>
+              <a:rPr lang="es-ES" sz="1600" dirty="0">
+                <a:solidFill>
+                  <a:srgbClr val="FF0000"/>
+                </a:solidFill>
+              </a:rPr>
+              <a:t> score </a:t>
+            </a:r>
+            <a:r>
+              <a:rPr lang="es-ES" sz="1600" dirty="0" err="1">
+                <a:solidFill>
+                  <a:srgbClr val="FF0000"/>
+                </a:solidFill>
+              </a:rPr>
+              <a:t>is</a:t>
+            </a:r>
+            <a:r>
+              <a:rPr lang="es-ES" sz="1600" dirty="0">
+                <a:solidFill>
+                  <a:srgbClr val="FF0000"/>
+                </a:solidFill>
+              </a:rPr>
+              <a:t> </a:t>
+            </a:r>
+            <a:r>
+              <a:rPr lang="es-ES" sz="1600" dirty="0" err="1">
+                <a:solidFill>
+                  <a:srgbClr val="FF0000"/>
+                </a:solidFill>
+              </a:rPr>
+              <a:t>the</a:t>
+            </a:r>
+            <a:r>
+              <a:rPr lang="es-ES" sz="1600" dirty="0">
+                <a:solidFill>
+                  <a:srgbClr val="FF0000"/>
+                </a:solidFill>
+              </a:rPr>
+              <a:t> mean </a:t>
+            </a:r>
+          </a:p>
+          <a:p>
+            <a:r>
+              <a:rPr lang="es-ES" sz="1600" dirty="0" err="1">
+                <a:solidFill>
+                  <a:srgbClr val="FF0000"/>
+                </a:solidFill>
+              </a:rPr>
+              <a:t>of</a:t>
+            </a:r>
+            <a:r>
+              <a:rPr lang="es-ES" sz="1600" dirty="0">
+                <a:solidFill>
+                  <a:srgbClr val="FF0000"/>
+                </a:solidFill>
+              </a:rPr>
+              <a:t> </a:t>
+            </a:r>
+            <a:r>
+              <a:rPr lang="es-ES" sz="1600" dirty="0" err="1">
+                <a:solidFill>
+                  <a:srgbClr val="FF0000"/>
+                </a:solidFill>
+              </a:rPr>
+              <a:t>the</a:t>
+            </a:r>
+            <a:r>
+              <a:rPr lang="es-ES" sz="1600" dirty="0">
+                <a:solidFill>
+                  <a:srgbClr val="FF0000"/>
+                </a:solidFill>
+              </a:rPr>
+              <a:t> score </a:t>
+            </a:r>
+            <a:r>
+              <a:rPr lang="es-ES" sz="1600" dirty="0" err="1">
+                <a:solidFill>
+                  <a:srgbClr val="FF0000"/>
+                </a:solidFill>
+              </a:rPr>
+              <a:t>among</a:t>
+            </a:r>
+            <a:r>
+              <a:rPr lang="es-ES" sz="1600" dirty="0">
+                <a:solidFill>
+                  <a:srgbClr val="FF0000"/>
+                </a:solidFill>
+              </a:rPr>
+              <a:t> </a:t>
+            </a:r>
+            <a:r>
+              <a:rPr lang="es-ES" sz="1600" dirty="0" err="1">
+                <a:solidFill>
+                  <a:srgbClr val="FF0000"/>
+                </a:solidFill>
+              </a:rPr>
+              <a:t>all</a:t>
+            </a:r>
+            <a:r>
+              <a:rPr lang="es-ES" sz="1600" dirty="0">
+                <a:solidFill>
+                  <a:srgbClr val="FF0000"/>
+                </a:solidFill>
+              </a:rPr>
+              <a:t> </a:t>
+            </a:r>
+            <a:r>
+              <a:rPr lang="es-ES" sz="1600" dirty="0" err="1">
+                <a:solidFill>
+                  <a:srgbClr val="FF0000"/>
+                </a:solidFill>
+              </a:rPr>
+              <a:t>obs</a:t>
+            </a:r>
+            <a:endParaRPr lang="en-US" sz="1600" dirty="0">
+              <a:solidFill>
+                <a:srgbClr val="FF0000"/>
+              </a:solidFill>
+            </a:endParaRPr>
+          </a:p>
+        </p:txBody>
+      </p:sp>
     </p:spTree>
     <p:extLst>
       <p:ext uri="{BB962C8B-B14F-4D97-AF65-F5344CB8AC3E}">
@@ -22892,7 +23270,7 @@
               <a:rPr lang="en-US" sz="2000" i="1" dirty="0">
                 <a:latin typeface="+mj-lt"/>
               </a:rPr>
-              <a:t>silhouette diagram</a:t>
+              <a:t>silhouette diagram.</a:t>
             </a:r>
             <a:endParaRPr lang="en-US" sz="2000" dirty="0">
               <a:latin typeface="+mj-lt"/>
@@ -22910,7 +23288,7 @@
               <a:rPr lang="en-US" sz="2000" dirty="0">
                 <a:latin typeface="+mj-lt"/>
               </a:rPr>
-              <a:t>The diagram contains one knife shape per cluster. The shape’s height indicates the number of instances the cluster contains. The width represents the sorted silhouette coefficients of the instances in the cluster. The dashed line indicates the mean silhouette coefficient</a:t>
+              <a:t>The diagram contains one knife shape per cluster. The shape’s height indicates the number of instances the cluster contains. The width represents the sorted silhouette coefficients of the instances in the cluster. The dashed line indicates the mean silhouette coefficient.</a:t>
             </a:r>
           </a:p>
           <a:p>
@@ -24418,7 +24796,7 @@
               <a:rPr lang="en-US" sz="2000" dirty="0">
                 <a:latin typeface="+mj-lt"/>
               </a:rPr>
-              <a:t>means has its advantages (fast and scalable), it also counts with notable drawbacks</a:t>
+              <a:t>means has its advantages (fast and scalable), it also counts with notable drawbacks:</a:t>
             </a:r>
           </a:p>
           <a:p>
@@ -24433,7 +24811,7 @@
               <a:rPr lang="en-US" sz="1600" dirty="0">
                 <a:latin typeface="+mj-lt"/>
               </a:rPr>
-              <a:t>It is necessary to run the algorithm several times to avoid suboptimal solutions</a:t>
+              <a:t>It is necessary to run the algorithm several times to avoid suboptimal solutions.</a:t>
             </a:r>
           </a:p>
           <a:p>
@@ -24448,7 +24826,7 @@
               <a:rPr lang="en-US" sz="1600" dirty="0">
                 <a:latin typeface="+mj-lt"/>
               </a:rPr>
-              <a:t>We need to specify the number of clusters, which can be quite a hassle</a:t>
+              <a:t>We need to specify the number of clusters, which can be quite a hassle.</a:t>
             </a:r>
           </a:p>
           <a:p>
@@ -24469,7 +24847,7 @@
               <a:rPr lang="en-US" sz="1600" dirty="0">
                 <a:latin typeface="+mj-lt"/>
               </a:rPr>
-              <a:t>-means do not behave well when the clusters have varying sizes, different densities or non-spherical shapes</a:t>
+              <a:t>-means do not behave well when the clusters have varying sizes, different densities or non-spherical shapes.</a:t>
             </a:r>
             <a:endParaRPr lang="en-US" sz="1600" i="1" dirty="0">
               <a:latin typeface="+mj-lt"/>
@@ -25364,13 +25742,13 @@
               <a:rPr lang="en-US" sz="2000" dirty="0">
                 <a:latin typeface="+mj-lt"/>
               </a:rPr>
-              <a:t>Hierarchical clustering is a technique that does not require us to specify in advance the number of clusters. It also provides a tree-based representation of the clusters called </a:t>
+              <a:t>Hierarchical clustering is a technique that does not require to specify in advance the number of clusters. It also provides a tree-based representation of the clusters called </a:t>
             </a:r>
             <a:r>
               <a:rPr lang="en-US" sz="2000" i="1" dirty="0">
                 <a:latin typeface="+mj-lt"/>
               </a:rPr>
-              <a:t>dendrogram</a:t>
+              <a:t>dendrogram.</a:t>
             </a:r>
           </a:p>
           <a:p>
@@ -25397,7 +25775,19 @@
               <a:rPr lang="en-US" sz="2000" dirty="0">
                 <a:latin typeface="+mj-lt"/>
               </a:rPr>
-              <a:t>clustering. The dendrogram is built starting from the leaves and combining clusters up to the trunk</a:t>
+              <a:t>clustering. The dendrogram is built starting from the leaves and combining clusters </a:t>
+            </a:r>
+            <a:r>
+              <a:rPr lang="en-US" sz="2000" b="1" dirty="0">
+                <a:latin typeface="+mj-lt"/>
+              </a:rPr>
+              <a:t>up to the trunk</a:t>
+            </a:r>
+            <a:r>
+              <a:rPr lang="en-US" sz="2000" dirty="0">
+                <a:latin typeface="+mj-lt"/>
+              </a:rPr>
+              <a:t>.</a:t>
             </a:r>
           </a:p>
           <a:p>
@@ -25412,7 +25802,7 @@
               <a:rPr lang="en-US" sz="2000" dirty="0">
                 <a:latin typeface="+mj-lt"/>
               </a:rPr>
-              <a:t>The algorithm starts by considering each observation as its own cluster. Then it computes a similarity measure (Euclidean distance, for instance) and merges observations based on it</a:t>
+              <a:t>The algorithm starts by considering each observation as its own cluster. Then it computes a similarity measure (Euclidean distance, for instance) and merges observations based on it.</a:t>
             </a:r>
           </a:p>
           <a:p>
@@ -25439,7 +25829,7 @@
               <a:rPr lang="en-US" sz="2000" dirty="0">
                 <a:latin typeface="+mj-lt"/>
               </a:rPr>
-              <a:t> clusters. The next to clusters that are most similar are fused again, and so on, until all observations pertain to one only cluster</a:t>
+              <a:t> clusters. The next two clusters that are most similar are fused again, and so on, until all observations pertain to one only cluster.</a:t>
             </a:r>
           </a:p>
           <a:p>
@@ -26244,7 +26634,7 @@
         <p:spPr>
           <a:xfrm>
             <a:off x="1045968" y="5487722"/>
-            <a:ext cx="2973445" cy="523220"/>
+            <a:ext cx="2973445" cy="738664"/>
           </a:xfrm>
           <a:prstGeom prst="rect">
             <a:avLst/>
@@ -26264,7 +26654,7 @@
                   <a:srgbClr val="FF0000"/>
                 </a:solidFill>
               </a:rPr>
-              <a:t>Clusters painted in colors for you. They are not passed to the algorithm!</a:t>
+              <a:t>Clusters painted in colors for you. The algorithm don´t know the classification (because it doesn´t exist)</a:t>
             </a:r>
           </a:p>
         </p:txBody>
@@ -26968,10 +27358,16 @@
               <a:buChar char="§"/>
             </a:pPr>
             <a:r>
+              <a:rPr lang="en-US" sz="2000" b="1" dirty="0">
+                <a:latin typeface="+mj-lt"/>
+              </a:rPr>
+              <a:t>DBSCAN</a:t>
+            </a:r>
+            <a:r>
               <a:rPr lang="en-US" sz="2000" dirty="0">
                 <a:latin typeface="+mj-lt"/>
               </a:rPr>
-              <a:t>DBSCAN: Defines clusters as continuous regions of high density. This is, if there are regions with no data, and other regions with a high concentration of data</a:t>
+              <a:t>: Defines clusters as continuous regions of high density. This is, if there are regions with no data, and other regions with a high concentration of data.</a:t>
             </a:r>
           </a:p>
           <a:p>
@@ -26983,10 +27379,16 @@
               <a:buChar char="§"/>
             </a:pPr>
             <a:r>
+              <a:rPr lang="en-US" sz="2000" b="1" dirty="0">
+                <a:latin typeface="+mj-lt"/>
+              </a:rPr>
+              <a:t>BIRCH</a:t>
+            </a:r>
+            <a:r>
               <a:rPr lang="en-US" sz="2000" dirty="0">
                 <a:latin typeface="+mj-lt"/>
               </a:rPr>
-              <a:t>BIRCH: Suitable for very large datasets with just a few features</a:t>
+              <a:t>: Suitable for very large datasets with just a few features.</a:t>
             </a:r>
           </a:p>
           <a:p>
@@ -26998,10 +27400,16 @@
               <a:buChar char="§"/>
             </a:pPr>
             <a:r>
+              <a:rPr lang="en-US" sz="2000" b="1" dirty="0">
+                <a:latin typeface="+mj-lt"/>
+              </a:rPr>
+              <a:t>Mean-shift</a:t>
+            </a:r>
+            <a:r>
               <a:rPr lang="en-US" sz="2000" dirty="0">
                 <a:latin typeface="+mj-lt"/>
               </a:rPr>
-              <a:t>Mean-shift: Groups observations in circles of high density. Not suitable for large datasets</a:t>
+              <a:t>: Groups observations in circles of high density. Not suitable for large datasets.</a:t>
             </a:r>
           </a:p>
           <a:p>
@@ -27013,10 +27421,16 @@
               <a:buChar char="§"/>
             </a:pPr>
             <a:r>
+              <a:rPr lang="en-US" sz="2000" b="1" dirty="0">
+                <a:latin typeface="+mj-lt"/>
+              </a:rPr>
+              <a:t>Affinity propagation</a:t>
+            </a:r>
+            <a:r>
               <a:rPr lang="en-US" sz="2000" dirty="0">
                 <a:latin typeface="+mj-lt"/>
               </a:rPr>
-              <a:t>Affinity propagation: Uses a voting system. Not suitable for large datasets</a:t>
+              <a:t>: Uses a voting system. Not suitable for large datasets.</a:t>
             </a:r>
           </a:p>
           <a:p>
@@ -27028,10 +27442,16 @@
               <a:buChar char="§"/>
             </a:pPr>
             <a:r>
+              <a:rPr lang="en-US" sz="2000" b="1" dirty="0">
+                <a:latin typeface="+mj-lt"/>
+              </a:rPr>
+              <a:t>Spectral clustering</a:t>
+            </a:r>
+            <a:r>
               <a:rPr lang="en-US" sz="2000" dirty="0">
                 <a:latin typeface="+mj-lt"/>
               </a:rPr>
-              <a:t>Spectral clustering: Applies a dimensionality reduction and then applies another clustering algorithm to that space</a:t>
+              <a:t>: Applies a dimensionality reduction and then applies another clustering algorithm to that space.</a:t>
             </a:r>
           </a:p>
           <a:p>
@@ -27043,20 +27463,17 @@
               <a:buChar char="§"/>
             </a:pPr>
             <a:r>
+              <a:rPr lang="en-US" sz="2000" b="1" dirty="0">
+                <a:latin typeface="+mj-lt"/>
+              </a:rPr>
+              <a:t>Gaussian mixture</a:t>
+            </a:r>
+            <a:r>
               <a:rPr lang="en-US" sz="2000" dirty="0">
                 <a:latin typeface="+mj-lt"/>
               </a:rPr>
-              <a:t>Gaussian mixture: Appropriate for </a:t>
-            </a:r>
-            <a:r>
-              <a:rPr lang="en-US" sz="2000">
-                <a:latin typeface="+mj-lt"/>
-              </a:rPr>
-              <a:t>ellipsoidal clusters</a:t>
-            </a:r>
-            <a:endParaRPr lang="en-US" sz="2000" dirty="0">
-              <a:latin typeface="+mj-lt"/>
-            </a:endParaRPr>
+              <a:t>: Appropriate for ellipsoidal clusters</a:t>
+            </a:r>
           </a:p>
         </p:txBody>
       </p:sp>
@@ -27940,7 +28357,7 @@
               <a:rPr lang="en-US" sz="2000" dirty="0">
                 <a:latin typeface="+mj-lt"/>
               </a:rPr>
-              <a:t> in a data set</a:t>
+              <a:t> in a data set.</a:t>
             </a:r>
             <a:endParaRPr lang="en-US" sz="2000" i="1" dirty="0">
               <a:latin typeface="+mj-lt"/>
@@ -27982,7 +28399,7 @@
               <a:rPr lang="en-US" sz="2000" dirty="0">
                 <a:latin typeface="+mj-lt"/>
               </a:rPr>
-              <a:t>, while observations in different groups, are different from each other</a:t>
+              <a:t>, while observations in different groups, are different from each other.</a:t>
             </a:r>
           </a:p>
           <a:p>
@@ -28411,8 +28828,8 @@
           </a:p>
         </p:txBody>
       </p:sp>
-      <mc:AlternateContent xmlns:mc="http://schemas.openxmlformats.org/markup-compatibility/2006" xmlns:a14="http://schemas.microsoft.com/office/drawing/2010/main">
-        <mc:Choice Requires="a14">
+      <mc:AlternateContent xmlns:mc="http://schemas.openxmlformats.org/markup-compatibility/2006">
+        <mc:Choice xmlns:a14="http://schemas.microsoft.com/office/drawing/2010/main" Requires="a14">
           <p:sp>
             <p:nvSpPr>
               <p:cNvPr id="3" name="Content Placeholder 2">
@@ -28477,7 +28894,7 @@
                   <a:rPr lang="en-US" sz="1800" dirty="0">
                     <a:latin typeface="+mj-lt"/>
                   </a:rPr>
-                  <a:t>, clusters</a:t>
+                  <a:t>, clusters.</a:t>
                 </a:r>
               </a:p>
               <a:p>
@@ -28611,9 +29028,12 @@
                     </m:sSub>
                   </m:oMath>
                 </a14:m>
-                <a:endParaRPr lang="en-US" sz="1800" b="1" dirty="0">
-                  <a:latin typeface="+mj-lt"/>
-                </a:endParaRPr>
+                <a:r>
+                  <a:rPr lang="en-US" sz="1800" b="1" dirty="0">
+                    <a:latin typeface="+mj-lt"/>
+                  </a:rPr>
+                  <a:t>.</a:t>
+                </a:r>
               </a:p>
               <a:p>
                 <a:pPr>
@@ -28907,7 +29327,7 @@
             </p:txBody>
           </p:sp>
         </mc:Choice>
-        <mc:Fallback xmlns="">
+        <mc:Fallback>
           <p:sp>
             <p:nvSpPr>
               <p:cNvPr id="3" name="Content Placeholder 2">
@@ -29347,8 +29767,8 @@
           </a:p>
         </p:txBody>
       </p:sp>
-      <mc:AlternateContent xmlns:mc="http://schemas.openxmlformats.org/markup-compatibility/2006" xmlns:a14="http://schemas.microsoft.com/office/drawing/2010/main">
-        <mc:Choice Requires="a14">
+      <mc:AlternateContent xmlns:mc="http://schemas.openxmlformats.org/markup-compatibility/2006">
+        <mc:Choice xmlns:a14="http://schemas.microsoft.com/office/drawing/2010/main" Requires="a14">
           <p:sp>
             <p:nvSpPr>
               <p:cNvPr id="3" name="Content Placeholder 2">
@@ -29864,7 +30284,7 @@
                   <a:rPr lang="en-US" sz="2000" dirty="0">
                     <a:latin typeface="+mj-lt"/>
                   </a:rPr>
-                  <a:t> cluster</a:t>
+                  <a:t> cluster.</a:t>
                 </a:r>
               </a:p>
               <a:p>
@@ -29915,13 +30335,13 @@
                   <a:rPr lang="en-US" sz="2000" dirty="0">
                     <a:latin typeface="+mj-lt"/>
                   </a:rPr>
-                  <a:t> cluster</a:t>
+                  <a:t> cluster.</a:t>
                 </a:r>
               </a:p>
             </p:txBody>
           </p:sp>
         </mc:Choice>
-        <mc:Fallback xmlns="">
+        <mc:Fallback>
           <p:sp>
             <p:nvSpPr>
               <p:cNvPr id="3" name="Content Placeholder 2">
@@ -31008,7 +31428,7 @@
               <a:rPr lang="en-US" sz="2000" dirty="0">
                 <a:latin typeface="+mj-lt"/>
               </a:rPr>
-              <a:t>-means is guaranteed to converge, to find a solution. Although it may not be global (not the best one but a local optimum)</a:t>
+              <a:t>-means is guaranteed to converge, to find a solution. Although it may not be global (not the best one but a local optimum).</a:t>
             </a:r>
           </a:p>
           <a:p>
@@ -31023,7 +31443,7 @@
               <a:rPr lang="en-US" sz="2000" dirty="0">
                 <a:latin typeface="+mj-lt"/>
               </a:rPr>
-              <a:t>The algorithm is actually sensitive to the first random initialization. We can mitigate this by:</a:t>
+              <a:t>The algorithm is sensitive to the first random initialization. We can mitigate this by:</a:t>
             </a:r>
           </a:p>
           <a:p>
@@ -31041,7 +31461,7 @@
               <a:t>If we happen to know approximately where the centroids should be, we can indicate them using the </a:t>
             </a:r>
             <a:r>
-              <a:rPr lang="en-US" sz="1600" i="1" dirty="0" err="1">
+              <a:rPr lang="en-US" sz="1600" b="1" i="1" dirty="0" err="1">
                 <a:latin typeface="+mj-lt"/>
               </a:rPr>
               <a:t>init</a:t>
@@ -31068,13 +31488,13 @@
               <a:t>Run the algorithm several times, using the </a:t>
             </a:r>
             <a:r>
-              <a:rPr lang="en-US" sz="1600" i="1" dirty="0" err="1">
+              <a:rPr lang="en-US" sz="1600" b="1" i="1" dirty="0" err="1">
                 <a:latin typeface="+mj-lt"/>
               </a:rPr>
               <a:t>n_init</a:t>
             </a:r>
             <a:r>
-              <a:rPr lang="en-US" sz="1600" i="1" dirty="0">
+              <a:rPr lang="en-US" sz="1600" b="1" i="1" dirty="0">
                 <a:latin typeface="+mj-lt"/>
               </a:rPr>
               <a:t> </a:t>
@@ -31158,7 +31578,7 @@
               <a:rPr lang="en-US" sz="2000" b="1" i="1" dirty="0">
                 <a:latin typeface="+mj-lt"/>
               </a:rPr>
-              <a:t>inertia</a:t>
+              <a:t>inertia.</a:t>
             </a:r>
           </a:p>
           <a:p>
@@ -31179,7 +31599,7 @@
               <a:rPr lang="en-US" sz="2000" b="1" dirty="0">
                 <a:latin typeface="+mj-lt"/>
               </a:rPr>
-              <a:t>its closest centroid</a:t>
+              <a:t>its closest centroid.</a:t>
             </a:r>
           </a:p>
           <a:p>
@@ -31635,7 +32055,7 @@
               <a:rPr lang="en-US" sz="2000" dirty="0">
                 <a:latin typeface="+mj-lt"/>
               </a:rPr>
-              <a:t>-means require to define a priori the number of clusters… How can we know?</a:t>
+              <a:t>-means require to define a priori the number of clusters… but how can we know in advance?</a:t>
             </a:r>
           </a:p>
           <a:p>
@@ -31650,7 +32070,7 @@
               <a:rPr lang="en-US" sz="2000" dirty="0">
                 <a:latin typeface="+mj-lt"/>
               </a:rPr>
-              <a:t>We can’t. We need to explore a range of number of clusters and pick up one</a:t>
+              <a:t>We can’t. We need to explore a range of number of clusters and pick up one.</a:t>
             </a:r>
           </a:p>
           <a:p>
@@ -31665,7 +32085,7 @@
               <a:rPr lang="en-US" sz="2000" dirty="0">
                 <a:latin typeface="+mj-lt"/>
               </a:rPr>
-              <a:t>It is tempting to chose the one with the lowest inertia. However, inertia always goes down as the number of clusters increase (obviously, the more clusters there are, the closer each instance would be to its centroid!)</a:t>
+              <a:t>It is tempting to chose the one with the lowest inertia. However, inertia always goes down as the number of clusters increase (obviously, the more clusters there are, the closer each instance would be to its centroid).</a:t>
             </a:r>
           </a:p>
           <a:p>
@@ -31680,7 +32100,7 @@
               <a:rPr lang="en-US" sz="2000" dirty="0">
                 <a:latin typeface="+mj-lt"/>
               </a:rPr>
-              <a:t>However, the contribution of an additional cluster to the goodness-of-fit diminishes as clusters increase. Hence, we only need to choose the one for which the next does not add much to the reduction of inertia</a:t>
+              <a:t>However, the contribution of an additional cluster to the goodness-of-fit diminishes as clusters increase. Hence, we only need to choose the one for which the next does not add much to the reduction of inertia.</a:t>
             </a:r>
           </a:p>
           <a:p>

--- a/Course content/Slides/Topic 8 - Clustering.pptx
+++ b/Course content/Slides/Topic 8 - Clustering.pptx
@@ -155,7 +155,7 @@
   <pc:docChgLst>
     <pc:chgData name="Javier Bas Vicente" userId="96bf8a96-3310-496c-8c7e-8a087f977faa" providerId="ADAL" clId="{AA8D9646-DA1F-465B-8718-46D21D0E85AB}"/>
     <pc:docChg chg="undo custSel modSld">
-      <pc:chgData name="Javier Bas Vicente" userId="96bf8a96-3310-496c-8c7e-8a087f977faa" providerId="ADAL" clId="{AA8D9646-DA1F-465B-8718-46D21D0E85AB}" dt="2023-11-21T10:04:23.203" v="254" actId="113"/>
+      <pc:chgData name="Javier Bas Vicente" userId="96bf8a96-3310-496c-8c7e-8a087f977faa" providerId="ADAL" clId="{AA8D9646-DA1F-465B-8718-46D21D0E85AB}" dt="2023-11-21T17:41:58.008" v="287" actId="114"/>
       <pc:docMkLst>
         <pc:docMk/>
       </pc:docMkLst>
@@ -310,7 +310,7 @@
         </pc:spChg>
       </pc:sldChg>
       <pc:sldChg chg="modSp mod">
-        <pc:chgData name="Javier Bas Vicente" userId="96bf8a96-3310-496c-8c7e-8a087f977faa" providerId="ADAL" clId="{AA8D9646-DA1F-465B-8718-46D21D0E85AB}" dt="2023-11-21T10:02:49.126" v="243" actId="20577"/>
+        <pc:chgData name="Javier Bas Vicente" userId="96bf8a96-3310-496c-8c7e-8a087f977faa" providerId="ADAL" clId="{AA8D9646-DA1F-465B-8718-46D21D0E85AB}" dt="2023-11-21T17:41:58.008" v="287" actId="114"/>
         <pc:sldMkLst>
           <pc:docMk/>
           <pc:sldMk cId="142238196" sldId="292"/>
@@ -321,6 +321,14 @@
             <pc:docMk/>
             <pc:sldMk cId="142238196" sldId="292"/>
             <ac:spMk id="14" creationId="{9A747A97-60F8-9BA4-E12B-345CDE22A582}"/>
+          </ac:spMkLst>
+        </pc:spChg>
+        <pc:spChg chg="mod">
+          <ac:chgData name="Javier Bas Vicente" userId="96bf8a96-3310-496c-8c7e-8a087f977faa" providerId="ADAL" clId="{AA8D9646-DA1F-465B-8718-46D21D0E85AB}" dt="2023-11-21T17:41:58.008" v="287" actId="114"/>
+          <ac:spMkLst>
+            <pc:docMk/>
+            <pc:sldMk cId="142238196" sldId="292"/>
+            <ac:spMk id="17" creationId="{D9BE7658-F186-4FFE-170A-50862CC72D80}"/>
           </ac:spMkLst>
         </pc:spChg>
       </pc:sldChg>
@@ -21894,8 +21902,8 @@
           </a:p>
         </p:txBody>
       </p:sp>
-      <mc:AlternateContent xmlns:mc="http://schemas.openxmlformats.org/markup-compatibility/2006">
-        <mc:Choice xmlns:a14="http://schemas.microsoft.com/office/drawing/2010/main" Requires="a14">
+      <mc:AlternateContent xmlns:mc="http://schemas.openxmlformats.org/markup-compatibility/2006" xmlns:a14="http://schemas.microsoft.com/office/drawing/2010/main">
+        <mc:Choice Requires="a14">
           <p:sp>
             <p:nvSpPr>
               <p:cNvPr id="3" name="Content Placeholder 2">
@@ -22179,7 +22187,7 @@
             </p:txBody>
           </p:sp>
         </mc:Choice>
-        <mc:Fallback>
+        <mc:Fallback xmlns="">
           <p:sp>
             <p:nvSpPr>
               <p:cNvPr id="3" name="Content Placeholder 2">
@@ -26716,7 +26724,7 @@
         <p:spPr>
           <a:xfrm>
             <a:off x="5273960" y="5919251"/>
-            <a:ext cx="3597869" cy="307777"/>
+            <a:ext cx="3597869" cy="523220"/>
           </a:xfrm>
           <a:prstGeom prst="rect">
             <a:avLst/>
@@ -26752,7 +26760,7 @@
                   <a:srgbClr val="FF0000"/>
                 </a:solidFill>
               </a:rPr>
-              <a:t>(complete, single, average, centroid)</a:t>
+              <a:t>method (a measure of similarity: complete, single, average, centroid)</a:t>
             </a:r>
             <a:endParaRPr lang="en-US" sz="1400" i="1" dirty="0">
               <a:solidFill>
@@ -28828,8 +28836,8 @@
           </a:p>
         </p:txBody>
       </p:sp>
-      <mc:AlternateContent xmlns:mc="http://schemas.openxmlformats.org/markup-compatibility/2006">
-        <mc:Choice xmlns:a14="http://schemas.microsoft.com/office/drawing/2010/main" Requires="a14">
+      <mc:AlternateContent xmlns:mc="http://schemas.openxmlformats.org/markup-compatibility/2006" xmlns:a14="http://schemas.microsoft.com/office/drawing/2010/main">
+        <mc:Choice Requires="a14">
           <p:sp>
             <p:nvSpPr>
               <p:cNvPr id="3" name="Content Placeholder 2">
@@ -29327,7 +29335,7 @@
             </p:txBody>
           </p:sp>
         </mc:Choice>
-        <mc:Fallback>
+        <mc:Fallback xmlns="">
           <p:sp>
             <p:nvSpPr>
               <p:cNvPr id="3" name="Content Placeholder 2">
@@ -29767,8 +29775,8 @@
           </a:p>
         </p:txBody>
       </p:sp>
-      <mc:AlternateContent xmlns:mc="http://schemas.openxmlformats.org/markup-compatibility/2006">
-        <mc:Choice xmlns:a14="http://schemas.microsoft.com/office/drawing/2010/main" Requires="a14">
+      <mc:AlternateContent xmlns:mc="http://schemas.openxmlformats.org/markup-compatibility/2006" xmlns:a14="http://schemas.microsoft.com/office/drawing/2010/main">
+        <mc:Choice Requires="a14">
           <p:sp>
             <p:nvSpPr>
               <p:cNvPr id="3" name="Content Placeholder 2">
@@ -30341,7 +30349,7 @@
             </p:txBody>
           </p:sp>
         </mc:Choice>
-        <mc:Fallback>
+        <mc:Fallback xmlns="">
           <p:sp>
             <p:nvSpPr>
               <p:cNvPr id="3" name="Content Placeholder 2">

--- a/Course content/Slides/Topic 8 - Clustering.pptx
+++ b/Course content/Slides/Topic 8 - Clustering.pptx
@@ -14,7 +14,7 @@
     <p:sldId id="281" r:id="rId5"/>
     <p:sldId id="280" r:id="rId6"/>
     <p:sldId id="282" r:id="rId7"/>
-    <p:sldId id="283" r:id="rId8"/>
+    <p:sldId id="294" r:id="rId8"/>
     <p:sldId id="284" r:id="rId9"/>
     <p:sldId id="285" r:id="rId10"/>
     <p:sldId id="286" r:id="rId11"/>
@@ -145,7 +145,7 @@
 <file path=ppt/revisionInfo.xml><?xml version="1.0" encoding="utf-8"?>
 <p1510:revInfo xmlns:a="http://schemas.openxmlformats.org/drawingml/2006/main" xmlns:r="http://schemas.openxmlformats.org/officeDocument/2006/relationships" xmlns:p1510="http://schemas.microsoft.com/office/powerpoint/2015/10/main">
   <p1510:revLst>
-    <p1510:client id="{AA8D9646-DA1F-465B-8718-46D21D0E85AB}" v="4" dt="2023-11-21T10:00:55.766"/>
+    <p1510:client id="{FC1D0665-E42A-4146-8F37-F1DA0E1DFC3A}" v="1" dt="2024-11-20T14:48:12.961"/>
   </p1510:revLst>
 </p1510:revInfo>
 </file>
@@ -349,6 +349,44 @@
       </pc:sldChg>
     </pc:docChg>
   </pc:docChgLst>
+  <pc:docChgLst>
+    <pc:chgData name="Javier Bas Vicente" userId="96bf8a96-3310-496c-8c7e-8a087f977faa" providerId="ADAL" clId="{FC1D0665-E42A-4146-8F37-F1DA0E1DFC3A}"/>
+    <pc:docChg chg="addSld delSld modSld">
+      <pc:chgData name="Javier Bas Vicente" userId="96bf8a96-3310-496c-8c7e-8a087f977faa" providerId="ADAL" clId="{FC1D0665-E42A-4146-8F37-F1DA0E1DFC3A}" dt="2024-11-20T14:48:20.337" v="2" actId="6549"/>
+      <pc:docMkLst>
+        <pc:docMk/>
+      </pc:docMkLst>
+      <pc:sldChg chg="modSp mod">
+        <pc:chgData name="Javier Bas Vicente" userId="96bf8a96-3310-496c-8c7e-8a087f977faa" providerId="ADAL" clId="{FC1D0665-E42A-4146-8F37-F1DA0E1DFC3A}" dt="2024-11-20T14:48:20.337" v="2" actId="6549"/>
+        <pc:sldMkLst>
+          <pc:docMk/>
+          <pc:sldMk cId="2149080833" sldId="278"/>
+        </pc:sldMkLst>
+        <pc:spChg chg="mod">
+          <ac:chgData name="Javier Bas Vicente" userId="96bf8a96-3310-496c-8c7e-8a087f977faa" providerId="ADAL" clId="{FC1D0665-E42A-4146-8F37-F1DA0E1DFC3A}" dt="2024-11-20T14:48:20.337" v="2" actId="6549"/>
+          <ac:spMkLst>
+            <pc:docMk/>
+            <pc:sldMk cId="2149080833" sldId="278"/>
+            <ac:spMk id="3" creationId="{6866AA87-E000-52D2-F65D-4B414B00BBE5}"/>
+          </ac:spMkLst>
+        </pc:spChg>
+      </pc:sldChg>
+      <pc:sldChg chg="del">
+        <pc:chgData name="Javier Bas Vicente" userId="96bf8a96-3310-496c-8c7e-8a087f977faa" providerId="ADAL" clId="{FC1D0665-E42A-4146-8F37-F1DA0E1DFC3A}" dt="2024-11-20T14:48:15.180" v="1" actId="47"/>
+        <pc:sldMkLst>
+          <pc:docMk/>
+          <pc:sldMk cId="4030116933" sldId="283"/>
+        </pc:sldMkLst>
+      </pc:sldChg>
+      <pc:sldChg chg="add">
+        <pc:chgData name="Javier Bas Vicente" userId="96bf8a96-3310-496c-8c7e-8a087f977faa" providerId="ADAL" clId="{FC1D0665-E42A-4146-8F37-F1DA0E1DFC3A}" dt="2024-11-20T14:48:12.944" v="0"/>
+        <pc:sldMkLst>
+          <pc:docMk/>
+          <pc:sldMk cId="2718952832" sldId="294"/>
+        </pc:sldMkLst>
+      </pc:sldChg>
+    </pc:docChg>
+  </pc:docChgLst>
 </pc:chgInfo>
 </file>
 
@@ -434,7 +472,7 @@
           <a:p>
             <a:fld id="{B9B1DC7F-8587-4047-9A5D-1FCB6614CAE0}" type="datetimeFigureOut">
               <a:rPr lang="en-US" smtClean="0"/>
-              <a:t>11/21/2023</a:t>
+              <a:t>11/20/2024</a:t>
             </a:fld>
             <a:endParaRPr lang="en-US"/>
           </a:p>
@@ -848,7 +886,7 @@
           <a:p>
             <a:fld id="{A7DB5662-7327-465C-9A70-AD96B7A8D67A}" type="datetimeFigureOut">
               <a:rPr lang="en-US" smtClean="0"/>
-              <a:t>11/21/2023</a:t>
+              <a:t>11/20/2024</a:t>
             </a:fld>
             <a:endParaRPr lang="en-US"/>
           </a:p>
@@ -1046,7 +1084,7 @@
           <a:p>
             <a:fld id="{A7DB5662-7327-465C-9A70-AD96B7A8D67A}" type="datetimeFigureOut">
               <a:rPr lang="en-US" smtClean="0"/>
-              <a:t>11/21/2023</a:t>
+              <a:t>11/20/2024</a:t>
             </a:fld>
             <a:endParaRPr lang="en-US"/>
           </a:p>
@@ -1254,7 +1292,7 @@
           <a:p>
             <a:fld id="{A7DB5662-7327-465C-9A70-AD96B7A8D67A}" type="datetimeFigureOut">
               <a:rPr lang="en-US" smtClean="0"/>
-              <a:t>11/21/2023</a:t>
+              <a:t>11/20/2024</a:t>
             </a:fld>
             <a:endParaRPr lang="en-US"/>
           </a:p>
@@ -1452,7 +1490,7 @@
           <a:p>
             <a:fld id="{A7DB5662-7327-465C-9A70-AD96B7A8D67A}" type="datetimeFigureOut">
               <a:rPr lang="en-US" smtClean="0"/>
-              <a:t>11/21/2023</a:t>
+              <a:t>11/20/2024</a:t>
             </a:fld>
             <a:endParaRPr lang="en-US"/>
           </a:p>
@@ -1727,7 +1765,7 @@
           <a:p>
             <a:fld id="{A7DB5662-7327-465C-9A70-AD96B7A8D67A}" type="datetimeFigureOut">
               <a:rPr lang="en-US" smtClean="0"/>
-              <a:t>11/21/2023</a:t>
+              <a:t>11/20/2024</a:t>
             </a:fld>
             <a:endParaRPr lang="en-US"/>
           </a:p>
@@ -1992,7 +2030,7 @@
           <a:p>
             <a:fld id="{A7DB5662-7327-465C-9A70-AD96B7A8D67A}" type="datetimeFigureOut">
               <a:rPr lang="en-US" smtClean="0"/>
-              <a:t>11/21/2023</a:t>
+              <a:t>11/20/2024</a:t>
             </a:fld>
             <a:endParaRPr lang="en-US"/>
           </a:p>
@@ -2404,7 +2442,7 @@
           <a:p>
             <a:fld id="{A7DB5662-7327-465C-9A70-AD96B7A8D67A}" type="datetimeFigureOut">
               <a:rPr lang="en-US" smtClean="0"/>
-              <a:t>11/21/2023</a:t>
+              <a:t>11/20/2024</a:t>
             </a:fld>
             <a:endParaRPr lang="en-US"/>
           </a:p>
@@ -2545,7 +2583,7 @@
           <a:p>
             <a:fld id="{A7DB5662-7327-465C-9A70-AD96B7A8D67A}" type="datetimeFigureOut">
               <a:rPr lang="en-US" smtClean="0"/>
-              <a:t>11/21/2023</a:t>
+              <a:t>11/20/2024</a:t>
             </a:fld>
             <a:endParaRPr lang="en-US"/>
           </a:p>
@@ -2658,7 +2696,7 @@
           <a:p>
             <a:fld id="{A7DB5662-7327-465C-9A70-AD96B7A8D67A}" type="datetimeFigureOut">
               <a:rPr lang="en-US" smtClean="0"/>
-              <a:t>11/21/2023</a:t>
+              <a:t>11/20/2024</a:t>
             </a:fld>
             <a:endParaRPr lang="en-US"/>
           </a:p>
@@ -2969,7 +3007,7 @@
           <a:p>
             <a:fld id="{A7DB5662-7327-465C-9A70-AD96B7A8D67A}" type="datetimeFigureOut">
               <a:rPr lang="en-US" smtClean="0"/>
-              <a:t>11/21/2023</a:t>
+              <a:t>11/20/2024</a:t>
             </a:fld>
             <a:endParaRPr lang="en-US"/>
           </a:p>
@@ -3257,7 +3295,7 @@
           <a:p>
             <a:fld id="{A7DB5662-7327-465C-9A70-AD96B7A8D67A}" type="datetimeFigureOut">
               <a:rPr lang="en-US" smtClean="0"/>
-              <a:t>11/21/2023</a:t>
+              <a:t>11/20/2024</a:t>
             </a:fld>
             <a:endParaRPr lang="en-US"/>
           </a:p>
@@ -3498,7 +3536,7 @@
           <a:p>
             <a:fld id="{A7DB5662-7327-465C-9A70-AD96B7A8D67A}" type="datetimeFigureOut">
               <a:rPr lang="en-US" smtClean="0"/>
-              <a:t>11/21/2023</a:t>
+              <a:t>11/20/2024</a:t>
             </a:fld>
             <a:endParaRPr lang="en-US"/>
           </a:p>
@@ -4043,13 +4081,6 @@
             </a:r>
           </a:p>
           <a:p>
-            <a:r>
-              <a:rPr lang="es-ES" sz="2000" dirty="0">
-                <a:latin typeface="+mj-lt"/>
-                <a:cs typeface="Times New Roman" panose="02020603050405020304" pitchFamily="18" charset="0"/>
-              </a:rPr>
-              <a:t>2022/2023</a:t>
-            </a:r>
             <a:endParaRPr lang="en-US" sz="2000" dirty="0">
               <a:latin typeface="+mj-lt"/>
               <a:cs typeface="Times New Roman" panose="02020603050405020304" pitchFamily="18" charset="0"/>
@@ -31415,7 +31446,7 @@
         <p:spPr/>
         <p:txBody>
           <a:bodyPr>
-            <a:normAutofit lnSpcReduction="10000"/>
+            <a:normAutofit/>
           </a:bodyPr>
           <a:lstStyle/>
           <a:p>
@@ -31427,16 +31458,142 @@
               <a:buChar char="§"/>
             </a:pPr>
             <a:r>
-              <a:rPr lang="en-US" sz="2000" i="1" dirty="0">
-                <a:latin typeface="+mj-lt"/>
-              </a:rPr>
-              <a:t>K</a:t>
-            </a:r>
-            <a:r>
               <a:rPr lang="en-US" sz="2000" dirty="0">
                 <a:latin typeface="+mj-lt"/>
               </a:rPr>
-              <a:t>-means is guaranteed to converge, to find a solution. Although it may not be global (not the best one but a local optimum).</a:t>
+              <a:t>The algorithm assigns each observation to a class, minimizing the within-cluster variation, as follows:</a:t>
+            </a:r>
+          </a:p>
+          <a:p>
+            <a:pPr marL="800100" lvl="1" indent="-342900">
+              <a:lnSpc>
+                <a:spcPct val="150000"/>
+              </a:lnSpc>
+              <a:buFont typeface="+mj-lt"/>
+              <a:buAutoNum type="arabicPeriod"/>
+            </a:pPr>
+            <a:r>
+              <a:rPr lang="en-US" sz="1900" dirty="0">
+                <a:latin typeface="+mj-lt"/>
+              </a:rPr>
+              <a:t>Randomly assign a cluster 1 to </a:t>
+            </a:r>
+            <a:r>
+              <a:rPr lang="en-US" sz="1900" i="1" dirty="0">
+                <a:latin typeface="+mj-lt"/>
+              </a:rPr>
+              <a:t>K, </a:t>
+            </a:r>
+            <a:r>
+              <a:rPr lang="en-US" sz="1900" dirty="0">
+                <a:latin typeface="+mj-lt"/>
+              </a:rPr>
+              <a:t>to each observation. These are the initial cluster assignments.</a:t>
+            </a:r>
+          </a:p>
+          <a:p>
+            <a:pPr marL="800100" lvl="1" indent="-342900">
+              <a:lnSpc>
+                <a:spcPct val="150000"/>
+              </a:lnSpc>
+              <a:buFont typeface="+mj-lt"/>
+              <a:buAutoNum type="arabicPeriod"/>
+            </a:pPr>
+            <a:r>
+              <a:rPr lang="en-US" sz="1900" dirty="0">
+                <a:latin typeface="+mj-lt"/>
+              </a:rPr>
+              <a:t>Iterate until cluster stops changing:</a:t>
+            </a:r>
+          </a:p>
+          <a:p>
+            <a:pPr marL="1257300" lvl="2" indent="-342900">
+              <a:lnSpc>
+                <a:spcPct val="150000"/>
+              </a:lnSpc>
+              <a:buFont typeface="+mj-lt"/>
+              <a:buAutoNum type="alphaLcParenR"/>
+            </a:pPr>
+            <a:r>
+              <a:rPr lang="en-US" sz="1500" dirty="0">
+                <a:latin typeface="+mj-lt"/>
+              </a:rPr>
+              <a:t>For each </a:t>
+            </a:r>
+            <a:r>
+              <a:rPr lang="en-US" sz="1500" i="1" dirty="0">
+                <a:latin typeface="+mj-lt"/>
+              </a:rPr>
+              <a:t>K </a:t>
+            </a:r>
+            <a:r>
+              <a:rPr lang="en-US" sz="1500" dirty="0">
+                <a:latin typeface="+mj-lt"/>
+              </a:rPr>
+              <a:t>cluster, compute its </a:t>
+            </a:r>
+            <a:r>
+              <a:rPr lang="en-US" sz="1500" i="1" dirty="0">
+                <a:latin typeface="+mj-lt"/>
+              </a:rPr>
+              <a:t>centroid. </a:t>
+            </a:r>
+            <a:r>
+              <a:rPr lang="en-US" sz="1500" dirty="0">
+                <a:latin typeface="+mj-lt"/>
+              </a:rPr>
+              <a:t>The centroid is the mean center of all the points assigned to its cluster (vector of the </a:t>
+            </a:r>
+            <a:r>
+              <a:rPr lang="en-US" sz="1500" i="1" dirty="0">
+                <a:latin typeface="+mj-lt"/>
+              </a:rPr>
+              <a:t>p</a:t>
+            </a:r>
+            <a:r>
+              <a:rPr lang="en-US" sz="1500" dirty="0">
+                <a:latin typeface="+mj-lt"/>
+              </a:rPr>
+              <a:t> features means for the observations in the </a:t>
+            </a:r>
+            <a:r>
+              <a:rPr lang="en-US" sz="1500" i="1" dirty="0">
+                <a:latin typeface="+mj-lt"/>
+              </a:rPr>
+              <a:t>kth </a:t>
+            </a:r>
+            <a:r>
+              <a:rPr lang="en-US" sz="1500" dirty="0">
+                <a:latin typeface="+mj-lt"/>
+              </a:rPr>
+              <a:t>cluster)</a:t>
+            </a:r>
+          </a:p>
+          <a:p>
+            <a:pPr marL="1257300" lvl="2" indent="-342900">
+              <a:lnSpc>
+                <a:spcPct val="150000"/>
+              </a:lnSpc>
+              <a:buFont typeface="+mj-lt"/>
+              <a:buAutoNum type="alphaLcParenR"/>
+            </a:pPr>
+            <a:r>
+              <a:rPr lang="en-US" sz="1500" i="1" dirty="0">
+                <a:latin typeface="+mj-lt"/>
+              </a:rPr>
+              <a:t>Re-assign each observation to the cluster </a:t>
+            </a:r>
+            <a:r>
+              <a:rPr lang="en-US" sz="1500" b="1" i="1" dirty="0">
+                <a:latin typeface="+mj-lt"/>
+              </a:rPr>
+              <a:t>whose centroid is closest </a:t>
+            </a:r>
+            <a:r>
+              <a:rPr lang="en-US" sz="1500" i="1" dirty="0">
+                <a:latin typeface="+mj-lt"/>
+              </a:rPr>
+              <a:t>(in terms of Euclidean distance)</a:t>
             </a:r>
           </a:p>
           <a:p>
@@ -31451,164 +31608,18 @@
               <a:rPr lang="en-US" sz="2000" dirty="0">
                 <a:latin typeface="+mj-lt"/>
               </a:rPr>
-              <a:t>The algorithm is sensitive to the first random initialization. We can mitigate this by:</a:t>
-            </a:r>
-          </a:p>
-          <a:p>
-            <a:pPr lvl="1">
-              <a:lnSpc>
-                <a:spcPct val="150000"/>
-              </a:lnSpc>
-              <a:buFont typeface="Wingdings" panose="05000000000000000000" pitchFamily="2" charset="2"/>
-              <a:buChar char="§"/>
-            </a:pPr>
-            <a:r>
-              <a:rPr lang="en-US" sz="1600" dirty="0">
-                <a:latin typeface="+mj-lt"/>
-              </a:rPr>
-              <a:t>If we happen to know approximately where the centroids should be, we can indicate them using the </a:t>
-            </a:r>
-            <a:r>
-              <a:rPr lang="en-US" sz="1600" b="1" i="1" dirty="0" err="1">
-                <a:latin typeface="+mj-lt"/>
-              </a:rPr>
-              <a:t>init</a:t>
-            </a:r>
-            <a:r>
-              <a:rPr lang="en-US" sz="1600" dirty="0">
-                <a:latin typeface="+mj-lt"/>
-              </a:rPr>
-              <a:t> hyperparameter</a:t>
-            </a:r>
-          </a:p>
-          <a:p>
-            <a:pPr lvl="1">
-              <a:lnSpc>
-                <a:spcPct val="150000"/>
-              </a:lnSpc>
-              <a:buFont typeface="Wingdings" panose="05000000000000000000" pitchFamily="2" charset="2"/>
-              <a:buChar char="§"/>
-            </a:pPr>
-            <a:r>
-              <a:rPr lang="en-US" sz="1600" dirty="0">
-                <a:latin typeface="+mj-lt"/>
-              </a:rPr>
-              <a:t>Run the algorithm several times, using the </a:t>
-            </a:r>
-            <a:r>
-              <a:rPr lang="en-US" sz="1600" b="1" i="1" dirty="0" err="1">
-                <a:latin typeface="+mj-lt"/>
-              </a:rPr>
-              <a:t>n_init</a:t>
-            </a:r>
-            <a:r>
-              <a:rPr lang="en-US" sz="1600" b="1" i="1" dirty="0">
-                <a:latin typeface="+mj-lt"/>
-              </a:rPr>
-              <a:t> </a:t>
-            </a:r>
-            <a:r>
-              <a:rPr lang="en-US" sz="1600" dirty="0">
-                <a:latin typeface="+mj-lt"/>
-              </a:rPr>
-              <a:t>hyperparameter (be </a:t>
-            </a:r>
-            <a:r>
-              <a:rPr lang="en-US" sz="1600" dirty="0" err="1">
-                <a:latin typeface="+mj-lt"/>
-              </a:rPr>
-              <a:t>carefull</a:t>
-            </a:r>
-            <a:r>
-              <a:rPr lang="en-US" sz="1600" dirty="0">
-                <a:latin typeface="+mj-lt"/>
-              </a:rPr>
-              <a:t>, their names are similar)</a:t>
-            </a:r>
-          </a:p>
-          <a:p>
-            <a:pPr>
-              <a:lnSpc>
-                <a:spcPct val="150000"/>
-              </a:lnSpc>
-              <a:buFont typeface="Wingdings" panose="05000000000000000000" pitchFamily="2" charset="2"/>
-              <a:buChar char="§"/>
-            </a:pPr>
-            <a:r>
-              <a:rPr lang="en-US" sz="2000" dirty="0">
-                <a:latin typeface="+mj-lt"/>
-              </a:rPr>
-              <a:t>By default, </a:t>
-            </a:r>
-            <a:r>
-              <a:rPr lang="en-US" sz="2000" dirty="0" err="1">
-                <a:latin typeface="+mj-lt"/>
-              </a:rPr>
-              <a:t>sklearn</a:t>
+              <a:t>A visualization: </a:t>
             </a:r>
             <a:r>
               <a:rPr lang="en-US" sz="2000" dirty="0">
                 <a:latin typeface="+mj-lt"/>
+                <a:hlinkClick r:id="rId2"/>
               </a:rPr>
-              <a:t> uses </a:t>
+              <a:t>https://www.naftaliharris.com/blog/visualizing-k-means-clustering/</a:t>
             </a:r>
-            <a:r>
-              <a:rPr lang="en-US" sz="2000" i="1" dirty="0" err="1">
-                <a:latin typeface="+mj-lt"/>
-              </a:rPr>
-              <a:t>n_init</a:t>
-            </a:r>
-            <a:r>
-              <a:rPr lang="en-US" sz="2000" i="1" dirty="0">
-                <a:latin typeface="+mj-lt"/>
-              </a:rPr>
-              <a:t> </a:t>
-            </a:r>
-            <a:r>
-              <a:rPr lang="en-US" sz="2000" dirty="0">
-                <a:latin typeface="+mj-lt"/>
-              </a:rPr>
-              <a:t>= 10</a:t>
-            </a:r>
-            <a:r>
-              <a:rPr lang="en-US" sz="2000" i="1" dirty="0">
-                <a:latin typeface="+mj-lt"/>
-              </a:rPr>
-              <a:t>, </a:t>
-            </a:r>
-            <a:r>
-              <a:rPr lang="en-US" sz="2000" dirty="0">
-                <a:latin typeface="+mj-lt"/>
-              </a:rPr>
-              <a:t>keeping the best solution. The best solution is that with the lowest </a:t>
-            </a:r>
-            <a:r>
-              <a:rPr lang="en-US" sz="2000" b="1" i="1" dirty="0">
-                <a:latin typeface="+mj-lt"/>
-              </a:rPr>
-              <a:t>inertia.</a:t>
-            </a:r>
-          </a:p>
-          <a:p>
-            <a:pPr>
-              <a:lnSpc>
-                <a:spcPct val="150000"/>
-              </a:lnSpc>
-              <a:buFont typeface="Wingdings" panose="05000000000000000000" pitchFamily="2" charset="2"/>
-              <a:buChar char="§"/>
-            </a:pPr>
-            <a:r>
-              <a:rPr lang="en-US" sz="2000" dirty="0">
-                <a:latin typeface="+mj-lt"/>
-              </a:rPr>
-              <a:t>Inertia is the mean squared distance between each instance and </a:t>
-            </a:r>
-            <a:r>
-              <a:rPr lang="en-US" sz="2000" b="1" dirty="0">
-                <a:latin typeface="+mj-lt"/>
-              </a:rPr>
-              <a:t>its closest centroid.</a:t>
-            </a:r>
+            <a:endParaRPr lang="en-US" sz="2000" dirty="0">
+              <a:latin typeface="+mj-lt"/>
+            </a:endParaRPr>
           </a:p>
           <a:p>
             <a:pPr marL="0" indent="0">
@@ -31961,7 +31972,7 @@
     </p:spTree>
     <p:extLst>
       <p:ext uri="{BB962C8B-B14F-4D97-AF65-F5344CB8AC3E}">
-        <p14:creationId xmlns:p14="http://schemas.microsoft.com/office/powerpoint/2010/main" val="4030116933"/>
+        <p14:creationId xmlns:p14="http://schemas.microsoft.com/office/powerpoint/2010/main" val="2718952832"/>
       </p:ext>
     </p:extLst>
   </p:cSld>
